--- a/modulos/06-engenharia-pipelines/sessao-ao-vivo-engenharia-pipelines.pptx
+++ b/modulos/06-engenharia-pipelines/sessao-ao-vivo-engenharia-pipelines.pptx
@@ -2,26 +2,26 @@
 <file path=ppt/presentation.xml><?xml version="1.0" encoding="utf-8"?>
 <p:presentation xmlns:p="http://schemas.openxmlformats.org/presentationml/2006/main">
   <p:sldMasterIdLst>
-    <p:sldMasterId xmlns:r="http://schemas.openxmlformats.org/officeDocument/2006/relationships" id="2147483648" r:id="R4615e04915244c03"/>
+    <p:sldMasterId xmlns:r="http://schemas.openxmlformats.org/officeDocument/2006/relationships" id="2147483648" r:id="Rc9a595c3dc104e88"/>
   </p:sldMasterIdLst>
   <p:notesMasterIdLst>
-    <p:notesMasterId xmlns:r="http://schemas.openxmlformats.org/officeDocument/2006/relationships" r:id="Rbc109a058dd24b12"/>
+    <p:notesMasterId xmlns:r="http://schemas.openxmlformats.org/officeDocument/2006/relationships" r:id="R73cdc77070b541a4"/>
   </p:notesMasterIdLst>
   <p:sldIdLst>
-    <p:sldId xmlns:r="http://schemas.openxmlformats.org/officeDocument/2006/relationships" id="256" r:id="R3e1f8d5803d44d01"/>
-    <p:sldId xmlns:r="http://schemas.openxmlformats.org/officeDocument/2006/relationships" id="257" r:id="Re0c8a04a77fe4f6a"/>
-    <p:sldId xmlns:r="http://schemas.openxmlformats.org/officeDocument/2006/relationships" id="258" r:id="R2bdea74816fe461d"/>
-    <p:sldId xmlns:r="http://schemas.openxmlformats.org/officeDocument/2006/relationships" id="259" r:id="Rd4fc7e914ffa47d4"/>
-    <p:sldId xmlns:r="http://schemas.openxmlformats.org/officeDocument/2006/relationships" id="260" r:id="R32a2e97693524e54"/>
-    <p:sldId xmlns:r="http://schemas.openxmlformats.org/officeDocument/2006/relationships" id="261" r:id="R12f6ed6f9fe74181"/>
-    <p:sldId xmlns:r="http://schemas.openxmlformats.org/officeDocument/2006/relationships" id="262" r:id="Ra3819d5b271c4dc6"/>
-    <p:sldId xmlns:r="http://schemas.openxmlformats.org/officeDocument/2006/relationships" id="263" r:id="R0817ba5ab295457a"/>
-    <p:sldId xmlns:r="http://schemas.openxmlformats.org/officeDocument/2006/relationships" id="264" r:id="Rfe09fcae760247e9"/>
-    <p:sldId xmlns:r="http://schemas.openxmlformats.org/officeDocument/2006/relationships" id="265" r:id="Rbd6a77780bad44ed"/>
-    <p:sldId xmlns:r="http://schemas.openxmlformats.org/officeDocument/2006/relationships" id="266" r:id="Rd03548497f6a4ad4"/>
-    <p:sldId xmlns:r="http://schemas.openxmlformats.org/officeDocument/2006/relationships" id="267" r:id="R875e3e869e1a4b8a"/>
-    <p:sldId xmlns:r="http://schemas.openxmlformats.org/officeDocument/2006/relationships" id="268" r:id="Ra3ff7967c42e4f77"/>
-    <p:sldId xmlns:r="http://schemas.openxmlformats.org/officeDocument/2006/relationships" id="269" r:id="R6211ec0037f14100"/>
+    <p:sldId xmlns:r="http://schemas.openxmlformats.org/officeDocument/2006/relationships" id="256" r:id="Rbfb0cf909bb24be6"/>
+    <p:sldId xmlns:r="http://schemas.openxmlformats.org/officeDocument/2006/relationships" id="257" r:id="Rca7f203471ab4992"/>
+    <p:sldId xmlns:r="http://schemas.openxmlformats.org/officeDocument/2006/relationships" id="258" r:id="Rac1cb67ff2414780"/>
+    <p:sldId xmlns:r="http://schemas.openxmlformats.org/officeDocument/2006/relationships" id="259" r:id="Rb97fee8a3270491a"/>
+    <p:sldId xmlns:r="http://schemas.openxmlformats.org/officeDocument/2006/relationships" id="260" r:id="R5c0665fcb4b941a6"/>
+    <p:sldId xmlns:r="http://schemas.openxmlformats.org/officeDocument/2006/relationships" id="261" r:id="Rb5f06b6e375d430a"/>
+    <p:sldId xmlns:r="http://schemas.openxmlformats.org/officeDocument/2006/relationships" id="262" r:id="R43932ce4986a44ad"/>
+    <p:sldId xmlns:r="http://schemas.openxmlformats.org/officeDocument/2006/relationships" id="263" r:id="R7b42973af1484473"/>
+    <p:sldId xmlns:r="http://schemas.openxmlformats.org/officeDocument/2006/relationships" id="264" r:id="Rdae39373fe6a466a"/>
+    <p:sldId xmlns:r="http://schemas.openxmlformats.org/officeDocument/2006/relationships" id="265" r:id="R5d81e363933d4613"/>
+    <p:sldId xmlns:r="http://schemas.openxmlformats.org/officeDocument/2006/relationships" id="266" r:id="Rbc703813d4aa4635"/>
+    <p:sldId xmlns:r="http://schemas.openxmlformats.org/officeDocument/2006/relationships" id="267" r:id="Rd96c404599cd4b26"/>
+    <p:sldId xmlns:r="http://schemas.openxmlformats.org/officeDocument/2006/relationships" id="268" r:id="R46908981293e4cac"/>
+    <p:sldId xmlns:r="http://schemas.openxmlformats.org/officeDocument/2006/relationships" id="269" r:id="R1a5084edf6724f23"/>
   </p:sldIdLst>
   <p:sldSz cx="12192000" cy="6858000"/>
   <p:notesSz cx="6858000" cy="9144000"/>
@@ -1426,7 +1426,7 @@
   </p:cSld>
   <p:clrMap bg1="lt1" tx1="dk1" bg2="lt2" tx2="dk2" accent1="accent1" accent2="accent2" accent3="accent3" accent4="accent4" accent5="accent5" accent6="accent6" hlink="hlink" folHlink="folHlink"/>
   <p:sldLayoutIdLst>
-    <p:sldLayoutId xmlns:r="http://schemas.openxmlformats.org/officeDocument/2006/relationships" id="2147483649" r:id="R5708fa5d0b3246aa"/>
+    <p:sldLayoutId xmlns:r="http://schemas.openxmlformats.org/officeDocument/2006/relationships" id="2147483649" r:id="Rd52beeac71ea49c4"/>
   </p:sldLayoutIdLst>
   <p:txStyles>
     <p:titleStyle>
@@ -1714,7 +1714,7 @@
     <p:bg>
       <p:bgPr>
         <a:solidFill xmlns:a="http://schemas.openxmlformats.org/drawingml/2006/main">
-          <a:srgbClr val="0E1B3E"/>
+          <a:srgbClr val="070F26"/>
         </a:solidFill>
       </p:bgPr>
     </p:bg>
@@ -1732,7 +1732,7 @@
           <p:cNvPr id="1" name="">
             <a:extLst xmlns:a="http://schemas.openxmlformats.org/drawingml/2006/main">
               <a:ext uri="{FF2B5EF4-FFF2-40B4-BE49-F238E27FC236}">
-                <a16:creationId xmlns:a16="http://schemas.microsoft.com/office/drawing/2014/main" id="{CEF38F60-4692-41DF-B729-49F81FF01C31}"/>
+                <a16:creationId xmlns:a16="http://schemas.microsoft.com/office/drawing/2014/main" id="{768E8FE2-6CEF-4EA3-ACDE-9B54873F9EF0}"/>
               </a:ext>
             </a:extLst>
           </p:cNvPr>
@@ -1750,7 +1750,7 @@
             <a:avLst/>
           </a:prstGeom>
           <a:solidFill xmlns:a="http://schemas.openxmlformats.org/drawingml/2006/main">
-            <a:srgbClr val="0E1B3E"/>
+            <a:srgbClr val="070F26"/>
           </a:solidFill>
           <a:ln xmlns:a="http://schemas.openxmlformats.org/drawingml/2006/main" w="0">
             <a:solidFill>
@@ -1771,7 +1771,7 @@
           <p:nvPr/>
         </p:nvPicPr>
         <p:blipFill>
-          <a:blip xmlns:r="http://schemas.openxmlformats.org/officeDocument/2006/relationships" xmlns:a="http://schemas.openxmlformats.org/drawingml/2006/main" r:embed="Re48e6f7ebaa5466d"/>
+          <a:blip xmlns:r="http://schemas.openxmlformats.org/officeDocument/2006/relationships" xmlns:a="http://schemas.openxmlformats.org/drawingml/2006/main" r:embed="R75c8befe283e4adc"/>
           <a:stretch xmlns:a="http://schemas.openxmlformats.org/drawingml/2006/main"/>
         </p:blipFill>
         <p:spPr>
@@ -1789,7 +1789,7 @@
           <p:cNvPr id="3" name="">
             <a:extLst xmlns:a="http://schemas.openxmlformats.org/drawingml/2006/main">
               <a:ext uri="{FF2B5EF4-FFF2-40B4-BE49-F238E27FC236}">
-                <a16:creationId xmlns:a16="http://schemas.microsoft.com/office/drawing/2014/main" id="{FC8AD9FA-D9C9-4793-8CD7-9910FFE8D221}"/>
+                <a16:creationId xmlns:a16="http://schemas.microsoft.com/office/drawing/2014/main" id="{CD097D21-CDFE-43A7-864F-5C14910991C3}"/>
               </a:ext>
             </a:extLst>
           </p:cNvPr>
@@ -1847,7 +1847,7 @@
           <p:cNvPr id="4" name="">
             <a:extLst xmlns:a="http://schemas.openxmlformats.org/drawingml/2006/main">
               <a:ext uri="{FF2B5EF4-FFF2-40B4-BE49-F238E27FC236}">
-                <a16:creationId xmlns:a16="http://schemas.microsoft.com/office/drawing/2014/main" id="{4BFD12E5-1B2A-46F5-8EA5-533550CB7421}"/>
+                <a16:creationId xmlns:a16="http://schemas.microsoft.com/office/drawing/2014/main" id="{14B1CC4D-BB3A-4383-AA8F-E024A53587DC}"/>
               </a:ext>
             </a:extLst>
           </p:cNvPr>
@@ -1905,7 +1905,7 @@
           <p:cNvPr id="5" name="">
             <a:extLst xmlns:a="http://schemas.openxmlformats.org/drawingml/2006/main">
               <a:ext uri="{FF2B5EF4-FFF2-40B4-BE49-F238E27FC236}">
-                <a16:creationId xmlns:a16="http://schemas.microsoft.com/office/drawing/2014/main" id="{011AD66D-4043-48FD-8060-493876BE19F1}"/>
+                <a16:creationId xmlns:a16="http://schemas.microsoft.com/office/drawing/2014/main" id="{D538A883-56E5-485E-9A5E-A275A0CC63C3}"/>
               </a:ext>
             </a:extLst>
           </p:cNvPr>
@@ -1967,7 +1967,7 @@
           <p:nvPr/>
         </p:nvPicPr>
         <p:blipFill>
-          <a:blip xmlns:r="http://schemas.openxmlformats.org/officeDocument/2006/relationships" xmlns:a="http://schemas.openxmlformats.org/drawingml/2006/main" r:embed="R1caa40edc0d8478c"/>
+          <a:blip xmlns:r="http://schemas.openxmlformats.org/officeDocument/2006/relationships" xmlns:a="http://schemas.openxmlformats.org/drawingml/2006/main" r:embed="Rb18f86d598954ca5"/>
           <a:stretch xmlns:a="http://schemas.openxmlformats.org/drawingml/2006/main"/>
         </p:blipFill>
         <p:spPr>
@@ -1985,7 +1985,7 @@
           <p:cNvPr id="7" name="">
             <a:extLst xmlns:a="http://schemas.openxmlformats.org/drawingml/2006/main">
               <a:ext uri="{FF2B5EF4-FFF2-40B4-BE49-F238E27FC236}">
-                <a16:creationId xmlns:a16="http://schemas.microsoft.com/office/drawing/2014/main" id="{A31B119A-CDAC-43A3-A112-101F1CD808B1}"/>
+                <a16:creationId xmlns:a16="http://schemas.microsoft.com/office/drawing/2014/main" id="{69C6B37A-2E92-4813-A5E0-DDBF1CA5F97B}"/>
               </a:ext>
             </a:extLst>
           </p:cNvPr>
@@ -2043,7 +2043,7 @@
           <p:cNvPr id="8" name="">
             <a:extLst xmlns:a="http://schemas.openxmlformats.org/drawingml/2006/main">
               <a:ext uri="{FF2B5EF4-FFF2-40B4-BE49-F238E27FC236}">
-                <a16:creationId xmlns:a16="http://schemas.microsoft.com/office/drawing/2014/main" id="{424E10DA-AC0C-4CF0-B455-54F8F9B98364}"/>
+                <a16:creationId xmlns:a16="http://schemas.microsoft.com/office/drawing/2014/main" id="{17B4DAB3-94CA-4A99-BBA8-2861AE49F123}"/>
               </a:ext>
             </a:extLst>
           </p:cNvPr>
@@ -2101,7 +2101,7 @@
           <p:cNvPr id="9" name="">
             <a:extLst xmlns:a="http://schemas.openxmlformats.org/drawingml/2006/main">
               <a:ext uri="{FF2B5EF4-FFF2-40B4-BE49-F238E27FC236}">
-                <a16:creationId xmlns:a16="http://schemas.microsoft.com/office/drawing/2014/main" id="{DE65467D-7E58-4F25-8918-51F07647D487}"/>
+                <a16:creationId xmlns:a16="http://schemas.microsoft.com/office/drawing/2014/main" id="{E5CEB221-6337-4B70-AFD8-3423B40F5655}"/>
               </a:ext>
             </a:extLst>
           </p:cNvPr>
@@ -2159,7 +2159,7 @@
           <p:cNvPr id="10" name="">
             <a:extLst xmlns:a="http://schemas.openxmlformats.org/drawingml/2006/main">
               <a:ext uri="{FF2B5EF4-FFF2-40B4-BE49-F238E27FC236}">
-                <a16:creationId xmlns:a16="http://schemas.microsoft.com/office/drawing/2014/main" id="{CAC7B897-8EC7-4554-92C5-B7FCDD198883}"/>
+                <a16:creationId xmlns:a16="http://schemas.microsoft.com/office/drawing/2014/main" id="{58976846-69A1-4DAB-8D3D-873659D4FB59}"/>
               </a:ext>
             </a:extLst>
           </p:cNvPr>
@@ -2194,7 +2194,7 @@
           <p:cNvPr id="11" name="">
             <a:extLst xmlns:a="http://schemas.openxmlformats.org/drawingml/2006/main">
               <a:ext uri="{FF2B5EF4-FFF2-40B4-BE49-F238E27FC236}">
-                <a16:creationId xmlns:a16="http://schemas.microsoft.com/office/drawing/2014/main" id="{716C7E57-F589-4A67-A6E8-06673BCBE1F9}"/>
+                <a16:creationId xmlns:a16="http://schemas.microsoft.com/office/drawing/2014/main" id="{77EB1711-C250-4959-8107-547BA5BEC795}"/>
               </a:ext>
             </a:extLst>
           </p:cNvPr>
@@ -2250,7 +2250,7 @@
     </p:spTree>
     <p:extLst>
       <p:ext uri="{BB962C8B-B14F-4D97-AF65-F5344CB8AC3E}">
-        <p14:creationId xmlns:p14="http://schemas.microsoft.com/office/powerpoint/2010/main" val="1269362983"/>
+        <p14:creationId xmlns:p14="http://schemas.microsoft.com/office/powerpoint/2010/main" val="36091354"/>
       </p:ext>
     </p:extLst>
   </p:cSld>
@@ -2263,7 +2263,7 @@
     <p:bg>
       <p:bgPr>
         <a:solidFill xmlns:a="http://schemas.openxmlformats.org/drawingml/2006/main">
-          <a:srgbClr val="0E1B3E"/>
+          <a:srgbClr val="070F26"/>
         </a:solidFill>
       </p:bgPr>
     </p:bg>
@@ -2281,7 +2281,7 @@
           <p:cNvPr id="1" name="">
             <a:extLst xmlns:a="http://schemas.openxmlformats.org/drawingml/2006/main">
               <a:ext uri="{FF2B5EF4-FFF2-40B4-BE49-F238E27FC236}">
-                <a16:creationId xmlns:a16="http://schemas.microsoft.com/office/drawing/2014/main" id="{342562E1-DB4D-489E-8B15-41E673726092}"/>
+                <a16:creationId xmlns:a16="http://schemas.microsoft.com/office/drawing/2014/main" id="{C5BB50E7-6224-4D9C-9249-2671CC6A791E}"/>
               </a:ext>
             </a:extLst>
           </p:cNvPr>
@@ -2299,7 +2299,7 @@
             <a:avLst/>
           </a:prstGeom>
           <a:solidFill xmlns:a="http://schemas.openxmlformats.org/drawingml/2006/main">
-            <a:srgbClr val="0E1B3E"/>
+            <a:srgbClr val="070F26"/>
           </a:solidFill>
           <a:ln xmlns:a="http://schemas.openxmlformats.org/drawingml/2006/main" w="0">
             <a:solidFill>
@@ -2320,7 +2320,7 @@
           <p:nvPr/>
         </p:nvPicPr>
         <p:blipFill>
-          <a:blip xmlns:r="http://schemas.openxmlformats.org/officeDocument/2006/relationships" xmlns:a="http://schemas.openxmlformats.org/drawingml/2006/main" r:embed="R9b71eeee2c3e4353"/>
+          <a:blip xmlns:r="http://schemas.openxmlformats.org/officeDocument/2006/relationships" xmlns:a="http://schemas.openxmlformats.org/drawingml/2006/main" r:embed="R1f1fb07e707c4c87"/>
           <a:stretch xmlns:a="http://schemas.openxmlformats.org/drawingml/2006/main"/>
         </p:blipFill>
         <p:spPr>
@@ -2338,7 +2338,7 @@
           <p:cNvPr id="3" name="">
             <a:extLst xmlns:a="http://schemas.openxmlformats.org/drawingml/2006/main">
               <a:ext uri="{FF2B5EF4-FFF2-40B4-BE49-F238E27FC236}">
-                <a16:creationId xmlns:a16="http://schemas.microsoft.com/office/drawing/2014/main" id="{DC5BB656-9A74-496B-87A2-7E2FE39CC25A}"/>
+                <a16:creationId xmlns:a16="http://schemas.microsoft.com/office/drawing/2014/main" id="{1245FA94-50B1-4ACE-87E0-E405DCA02E55}"/>
               </a:ext>
             </a:extLst>
           </p:cNvPr>
@@ -2396,7 +2396,7 @@
           <p:cNvPr id="4" name="">
             <a:extLst xmlns:a="http://schemas.openxmlformats.org/drawingml/2006/main">
               <a:ext uri="{FF2B5EF4-FFF2-40B4-BE49-F238E27FC236}">
-                <a16:creationId xmlns:a16="http://schemas.microsoft.com/office/drawing/2014/main" id="{35DC79FD-CCE9-4832-B6BA-18A508E2B71D}"/>
+                <a16:creationId xmlns:a16="http://schemas.microsoft.com/office/drawing/2014/main" id="{61C7812E-79FF-431B-B2CB-3055DEA0AD01}"/>
               </a:ext>
             </a:extLst>
           </p:cNvPr>
@@ -2454,7 +2454,7 @@
           <p:cNvPr id="5" name="">
             <a:extLst xmlns:a="http://schemas.openxmlformats.org/drawingml/2006/main">
               <a:ext uri="{FF2B5EF4-FFF2-40B4-BE49-F238E27FC236}">
-                <a16:creationId xmlns:a16="http://schemas.microsoft.com/office/drawing/2014/main" id="{ACA96EF2-E011-4969-862B-5A74A13827F1}"/>
+                <a16:creationId xmlns:a16="http://schemas.microsoft.com/office/drawing/2014/main" id="{6CA17F46-5916-407D-A892-B3101149BBA4}"/>
               </a:ext>
             </a:extLst>
           </p:cNvPr>
@@ -2512,7 +2512,7 @@
           <p:cNvPr id="6" name="">
             <a:extLst xmlns:a="http://schemas.openxmlformats.org/drawingml/2006/main">
               <a:ext uri="{FF2B5EF4-FFF2-40B4-BE49-F238E27FC236}">
-                <a16:creationId xmlns:a16="http://schemas.microsoft.com/office/drawing/2014/main" id="{45962E4C-E64E-4F92-9BC8-11EE94737BDB}"/>
+                <a16:creationId xmlns:a16="http://schemas.microsoft.com/office/drawing/2014/main" id="{79E89750-617E-4096-B5A6-DBB5EAB963EA}"/>
               </a:ext>
             </a:extLst>
           </p:cNvPr>
@@ -2574,13 +2574,13 @@
           <p:nvPr/>
         </p:nvPicPr>
         <p:blipFill>
-          <a:blip xmlns:r="http://schemas.openxmlformats.org/officeDocument/2006/relationships" xmlns:a="http://schemas.openxmlformats.org/drawingml/2006/main" r:embed="R3bd3f6bc87164436"/>
+          <a:blip xmlns:r="http://schemas.openxmlformats.org/officeDocument/2006/relationships" xmlns:a="http://schemas.openxmlformats.org/drawingml/2006/main" r:embed="Rf76cc4424b3a40cc"/>
           <a:stretch xmlns:a="http://schemas.openxmlformats.org/drawingml/2006/main"/>
         </p:blipFill>
         <p:spPr>
           <a:xfrm xmlns:a="http://schemas.openxmlformats.org/drawingml/2006/main">
-            <a:off x="476250" y="1257300"/>
-            <a:ext cx="2667000" cy="4533900"/>
+            <a:off x="0" y="1746250"/>
+            <a:ext cx="2667000" cy="3556000"/>
           </a:xfrm>
           <a:prstGeom xmlns:a="http://schemas.openxmlformats.org/drawingml/2006/main" prst="rect">
             <a:avLst/>
@@ -2592,7 +2592,7 @@
           <p:cNvPr id="8" name="">
             <a:extLst xmlns:a="http://schemas.openxmlformats.org/drawingml/2006/main">
               <a:ext uri="{FF2B5EF4-FFF2-40B4-BE49-F238E27FC236}">
-                <a16:creationId xmlns:a16="http://schemas.microsoft.com/office/drawing/2014/main" id="{00735EFA-F778-43C5-A550-7D20E6FE8093}"/>
+                <a16:creationId xmlns:a16="http://schemas.microsoft.com/office/drawing/2014/main" id="{EFD08D10-6D86-4845-AC56-829B330F4413}"/>
               </a:ext>
             </a:extLst>
           </p:cNvPr>
@@ -2650,7 +2650,7 @@
           <p:cNvPr id="9" name="">
             <a:extLst xmlns:a="http://schemas.openxmlformats.org/drawingml/2006/main">
               <a:ext uri="{FF2B5EF4-FFF2-40B4-BE49-F238E27FC236}">
-                <a16:creationId xmlns:a16="http://schemas.microsoft.com/office/drawing/2014/main" id="{7270F2AE-5A3B-449E-8AB1-11020D136DB0}"/>
+                <a16:creationId xmlns:a16="http://schemas.microsoft.com/office/drawing/2014/main" id="{E8EE5269-3B8E-4E76-88BA-9E3D6B08DD2B}"/>
               </a:ext>
             </a:extLst>
           </p:cNvPr>
@@ -2708,7 +2708,7 @@
           <p:cNvPr id="10" name="">
             <a:extLst xmlns:a="http://schemas.openxmlformats.org/drawingml/2006/main">
               <a:ext uri="{FF2B5EF4-FFF2-40B4-BE49-F238E27FC236}">
-                <a16:creationId xmlns:a16="http://schemas.microsoft.com/office/drawing/2014/main" id="{4536B096-5E1B-4854-9DC0-590955F5D6E5}"/>
+                <a16:creationId xmlns:a16="http://schemas.microsoft.com/office/drawing/2014/main" id="{CA844218-8FF4-4AB1-B930-9AB9A15E4A21}"/>
               </a:ext>
             </a:extLst>
           </p:cNvPr>
@@ -2764,7 +2764,7 @@
     </p:spTree>
     <p:extLst>
       <p:ext uri="{BB962C8B-B14F-4D97-AF65-F5344CB8AC3E}">
-        <p14:creationId xmlns:p14="http://schemas.microsoft.com/office/powerpoint/2010/main" val="901525668"/>
+        <p14:creationId xmlns:p14="http://schemas.microsoft.com/office/powerpoint/2010/main" val="252800092"/>
       </p:ext>
     </p:extLst>
   </p:cSld>
@@ -2795,7 +2795,7 @@
           <p:cNvPr id="1" name="">
             <a:extLst xmlns:a="http://schemas.openxmlformats.org/drawingml/2006/main">
               <a:ext uri="{FF2B5EF4-FFF2-40B4-BE49-F238E27FC236}">
-                <a16:creationId xmlns:a16="http://schemas.microsoft.com/office/drawing/2014/main" id="{938455FF-7367-4FBF-BFB0-33B387371907}"/>
+                <a16:creationId xmlns:a16="http://schemas.microsoft.com/office/drawing/2014/main" id="{D984E955-F2C1-4DC5-BC12-BC83D9671DEE}"/>
               </a:ext>
             </a:extLst>
           </p:cNvPr>
@@ -2834,7 +2834,7 @@
           <p:nvPr/>
         </p:nvPicPr>
         <p:blipFill>
-          <a:blip xmlns:r="http://schemas.openxmlformats.org/officeDocument/2006/relationships" xmlns:a="http://schemas.openxmlformats.org/drawingml/2006/main" r:embed="R2f25347ddafd4a39"/>
+          <a:blip xmlns:r="http://schemas.openxmlformats.org/officeDocument/2006/relationships" xmlns:a="http://schemas.openxmlformats.org/drawingml/2006/main" r:embed="R0574cd750d1a4249"/>
           <a:stretch xmlns:a="http://schemas.openxmlformats.org/drawingml/2006/main"/>
         </p:blipFill>
         <p:spPr>
@@ -2852,7 +2852,7 @@
           <p:cNvPr id="3" name="">
             <a:extLst xmlns:a="http://schemas.openxmlformats.org/drawingml/2006/main">
               <a:ext uri="{FF2B5EF4-FFF2-40B4-BE49-F238E27FC236}">
-                <a16:creationId xmlns:a16="http://schemas.microsoft.com/office/drawing/2014/main" id="{28ABD77D-4410-4573-816B-87F11BCC88D7}"/>
+                <a16:creationId xmlns:a16="http://schemas.microsoft.com/office/drawing/2014/main" id="{14A3DC55-5B3E-4EB9-982D-F1A4EC34EA5E}"/>
               </a:ext>
             </a:extLst>
           </p:cNvPr>
@@ -2890,14 +2890,14 @@
             <a:pPr algn="r">
               <a:defRPr sz="825" b="1">
                 <a:solidFill>
-                  <a:srgbClr val="0E1B3E"/>
+                  <a:srgbClr val="070F26"/>
                 </a:solidFill>
               </a:defRPr>
             </a:pPr>
             <a:r>
               <a:rPr sz="825" b="1">
                 <a:solidFill>
-                  <a:srgbClr val="0E1B3E"/>
+                  <a:srgbClr val="070F26"/>
                 </a:solidFill>
               </a:rPr>
               <a:t>NTT DATA UNIVERSITY</a:t>
@@ -2910,7 +2910,7 @@
           <p:cNvPr id="4" name="">
             <a:extLst xmlns:a="http://schemas.openxmlformats.org/drawingml/2006/main">
               <a:ext uri="{FF2B5EF4-FFF2-40B4-BE49-F238E27FC236}">
-                <a16:creationId xmlns:a16="http://schemas.microsoft.com/office/drawing/2014/main" id="{1F12F16C-6949-49F0-83CF-3E6685DD0BEC}"/>
+                <a16:creationId xmlns:a16="http://schemas.microsoft.com/office/drawing/2014/main" id="{3AE9D5C1-FC1B-43A6-A572-A18A953C6236}"/>
               </a:ext>
             </a:extLst>
           </p:cNvPr>
@@ -2968,7 +2968,7 @@
           <p:cNvPr id="5" name="">
             <a:extLst xmlns:a="http://schemas.openxmlformats.org/drawingml/2006/main">
               <a:ext uri="{FF2B5EF4-FFF2-40B4-BE49-F238E27FC236}">
-                <a16:creationId xmlns:a16="http://schemas.microsoft.com/office/drawing/2014/main" id="{667DC83E-F922-4F61-9165-F869BFB642B6}"/>
+                <a16:creationId xmlns:a16="http://schemas.microsoft.com/office/drawing/2014/main" id="{5988E76D-1393-4B85-BD39-5C538F7920D2}"/>
               </a:ext>
             </a:extLst>
           </p:cNvPr>
@@ -3026,7 +3026,7 @@
           <p:cNvPr id="6" name="">
             <a:extLst xmlns:a="http://schemas.openxmlformats.org/drawingml/2006/main">
               <a:ext uri="{FF2B5EF4-FFF2-40B4-BE49-F238E27FC236}">
-                <a16:creationId xmlns:a16="http://schemas.microsoft.com/office/drawing/2014/main" id="{AFF20791-C2D3-4740-A7CD-54AEACF142C6}"/>
+                <a16:creationId xmlns:a16="http://schemas.microsoft.com/office/drawing/2014/main" id="{EB6811AD-DE99-4B29-9E64-54C1592A44F1}"/>
               </a:ext>
             </a:extLst>
           </p:cNvPr>
@@ -3064,14 +3064,14 @@
             <a:pPr algn="r">
               <a:defRPr sz="675" b="1">
                 <a:solidFill>
-                  <a:srgbClr val="0E1B3E"/>
+                  <a:srgbClr val="070F26"/>
                 </a:solidFill>
               </a:defRPr>
             </a:pPr>
             <a:r>
               <a:rPr sz="675" b="1">
                 <a:solidFill>
-                  <a:srgbClr val="0E1B3E"/>
+                  <a:srgbClr val="070F26"/>
                 </a:solidFill>
               </a:rPr>
               <a:t>NTT DATA UNIVERSITY</a:t>
@@ -3084,7 +3084,7 @@
           <p:cNvPr id="7" name="">
             <a:extLst xmlns:a="http://schemas.openxmlformats.org/drawingml/2006/main">
               <a:ext uri="{FF2B5EF4-FFF2-40B4-BE49-F238E27FC236}">
-                <a16:creationId xmlns:a16="http://schemas.microsoft.com/office/drawing/2014/main" id="{41ACE06D-9235-4F58-AA11-E4F5FEE81EF2}"/>
+                <a16:creationId xmlns:a16="http://schemas.microsoft.com/office/drawing/2014/main" id="{F728BABE-FE5B-46C8-8D2A-E72DFC424803}"/>
               </a:ext>
             </a:extLst>
           </p:cNvPr>
@@ -3142,7 +3142,7 @@
           <p:cNvPr id="8" name="">
             <a:extLst xmlns:a="http://schemas.openxmlformats.org/drawingml/2006/main">
               <a:ext uri="{FF2B5EF4-FFF2-40B4-BE49-F238E27FC236}">
-                <a16:creationId xmlns:a16="http://schemas.microsoft.com/office/drawing/2014/main" id="{01CBF661-F79E-454D-883A-4379613614EA}"/>
+                <a16:creationId xmlns:a16="http://schemas.microsoft.com/office/drawing/2014/main" id="{F84D214D-10A1-4F6B-ABAB-09338AFC8E17}"/>
               </a:ext>
             </a:extLst>
           </p:cNvPr>
@@ -3180,14 +3180,14 @@
             <a:pPr algn="l">
               <a:defRPr sz="2400" b="0">
                 <a:solidFill>
-                  <a:srgbClr val="0E1B3E"/>
+                  <a:srgbClr val="070F26"/>
                 </a:solidFill>
               </a:defRPr>
             </a:pPr>
             <a:r>
               <a:rPr sz="2400" b="0">
                 <a:solidFill>
-                  <a:srgbClr val="0E1B3E"/>
+                  <a:srgbClr val="070F26"/>
                 </a:solidFill>
               </a:rPr>
               <a:t>Código de pipeline é código de produção</a:t>
@@ -3200,7 +3200,7 @@
           <p:cNvPr id="9" name="">
             <a:extLst xmlns:a="http://schemas.openxmlformats.org/drawingml/2006/main">
               <a:ext uri="{FF2B5EF4-FFF2-40B4-BE49-F238E27FC236}">
-                <a16:creationId xmlns:a16="http://schemas.microsoft.com/office/drawing/2014/main" id="{604612E9-EB3B-47CA-BAB0-1BCB1B0D5F08}"/>
+                <a16:creationId xmlns:a16="http://schemas.microsoft.com/office/drawing/2014/main" id="{239621C3-B510-49EC-8956-015278E78B25}"/>
               </a:ext>
             </a:extLst>
           </p:cNvPr>
@@ -3258,7 +3258,7 @@
           <p:cNvPr id="10" name="">
             <a:extLst xmlns:a="http://schemas.openxmlformats.org/drawingml/2006/main">
               <a:ext uri="{FF2B5EF4-FFF2-40B4-BE49-F238E27FC236}">
-                <a16:creationId xmlns:a16="http://schemas.microsoft.com/office/drawing/2014/main" id="{6719A8D2-4B9A-4538-AD6B-541BEB08E031}"/>
+                <a16:creationId xmlns:a16="http://schemas.microsoft.com/office/drawing/2014/main" id="{0ED23776-FABC-413C-8178-401B7F41A3F7}"/>
               </a:ext>
             </a:extLst>
           </p:cNvPr>
@@ -3291,7 +3291,7 @@
           <p:cNvPr id="11" name="">
             <a:extLst xmlns:a="http://schemas.openxmlformats.org/drawingml/2006/main">
               <a:ext uri="{FF2B5EF4-FFF2-40B4-BE49-F238E27FC236}">
-                <a16:creationId xmlns:a16="http://schemas.microsoft.com/office/drawing/2014/main" id="{178B1CCF-8087-4F6C-973F-29C884594A89}"/>
+                <a16:creationId xmlns:a16="http://schemas.microsoft.com/office/drawing/2014/main" id="{5D5BE7D8-627B-448C-AC28-7D32D1FE8D9F}"/>
               </a:ext>
             </a:extLst>
           </p:cNvPr>
@@ -3326,7 +3326,7 @@
           <p:cNvPr id="12" name="">
             <a:extLst xmlns:a="http://schemas.openxmlformats.org/drawingml/2006/main">
               <a:ext uri="{FF2B5EF4-FFF2-40B4-BE49-F238E27FC236}">
-                <a16:creationId xmlns:a16="http://schemas.microsoft.com/office/drawing/2014/main" id="{B84AC47E-01F3-4D94-911E-6553BBBF8BC3}"/>
+                <a16:creationId xmlns:a16="http://schemas.microsoft.com/office/drawing/2014/main" id="{A31F2428-69DA-4A1F-8467-F26F467A3E55}"/>
               </a:ext>
             </a:extLst>
           </p:cNvPr>
@@ -3384,7 +3384,7 @@
           <p:cNvPr id="13" name="">
             <a:extLst xmlns:a="http://schemas.openxmlformats.org/drawingml/2006/main">
               <a:ext uri="{FF2B5EF4-FFF2-40B4-BE49-F238E27FC236}">
-                <a16:creationId xmlns:a16="http://schemas.microsoft.com/office/drawing/2014/main" id="{F54D3F96-EC45-4A83-957D-7D918FA55EB7}"/>
+                <a16:creationId xmlns:a16="http://schemas.microsoft.com/office/drawing/2014/main" id="{4D9AB45C-C722-4276-B50A-87C028FB78B7}"/>
               </a:ext>
             </a:extLst>
           </p:cNvPr>
@@ -3476,7 +3476,7 @@
           <p:cNvPr id="14" name="">
             <a:extLst xmlns:a="http://schemas.openxmlformats.org/drawingml/2006/main">
               <a:ext uri="{FF2B5EF4-FFF2-40B4-BE49-F238E27FC236}">
-                <a16:creationId xmlns:a16="http://schemas.microsoft.com/office/drawing/2014/main" id="{1FDE2AB1-1926-44B0-8065-FBB0CEA6AD48}"/>
+                <a16:creationId xmlns:a16="http://schemas.microsoft.com/office/drawing/2014/main" id="{8B410D08-0096-4696-90AA-48297EA4889C}"/>
               </a:ext>
             </a:extLst>
           </p:cNvPr>
@@ -3509,7 +3509,7 @@
           <p:cNvPr id="15" name="">
             <a:extLst xmlns:a="http://schemas.openxmlformats.org/drawingml/2006/main">
               <a:ext uri="{FF2B5EF4-FFF2-40B4-BE49-F238E27FC236}">
-                <a16:creationId xmlns:a16="http://schemas.microsoft.com/office/drawing/2014/main" id="{04EAD3BC-C170-4134-A5D0-2A4FA0533EC8}"/>
+                <a16:creationId xmlns:a16="http://schemas.microsoft.com/office/drawing/2014/main" id="{A67CA671-FAFF-4F13-A2F4-20D616F8CEA0}"/>
               </a:ext>
             </a:extLst>
           </p:cNvPr>
@@ -3544,7 +3544,7 @@
           <p:cNvPr id="16" name="">
             <a:extLst xmlns:a="http://schemas.openxmlformats.org/drawingml/2006/main">
               <a:ext uri="{FF2B5EF4-FFF2-40B4-BE49-F238E27FC236}">
-                <a16:creationId xmlns:a16="http://schemas.microsoft.com/office/drawing/2014/main" id="{FF7315E5-D5F0-4306-BE72-BA04BAB8C012}"/>
+                <a16:creationId xmlns:a16="http://schemas.microsoft.com/office/drawing/2014/main" id="{2EEDA2A6-7A3B-4AAC-8674-8758AA00D5DE}"/>
               </a:ext>
             </a:extLst>
           </p:cNvPr>
@@ -3602,7 +3602,7 @@
           <p:cNvPr id="17" name="">
             <a:extLst xmlns:a="http://schemas.openxmlformats.org/drawingml/2006/main">
               <a:ext uri="{FF2B5EF4-FFF2-40B4-BE49-F238E27FC236}">
-                <a16:creationId xmlns:a16="http://schemas.microsoft.com/office/drawing/2014/main" id="{7C143927-EEFC-4B54-BE61-72D713A4F1B0}"/>
+                <a16:creationId xmlns:a16="http://schemas.microsoft.com/office/drawing/2014/main" id="{F1D0F21F-1638-4A53-B20B-F5B1F72A68ED}"/>
               </a:ext>
             </a:extLst>
           </p:cNvPr>
@@ -3694,7 +3694,7 @@
           <p:cNvPr id="18" name="">
             <a:extLst xmlns:a="http://schemas.openxmlformats.org/drawingml/2006/main">
               <a:ext uri="{FF2B5EF4-FFF2-40B4-BE49-F238E27FC236}">
-                <a16:creationId xmlns:a16="http://schemas.microsoft.com/office/drawing/2014/main" id="{E978011B-5D14-425F-9DDB-D33DADA345BE}"/>
+                <a16:creationId xmlns:a16="http://schemas.microsoft.com/office/drawing/2014/main" id="{9CA1CA2B-C431-4B43-807C-798AC462C65A}"/>
               </a:ext>
             </a:extLst>
           </p:cNvPr>
@@ -3727,7 +3727,7 @@
           <p:cNvPr id="19" name="">
             <a:extLst xmlns:a="http://schemas.openxmlformats.org/drawingml/2006/main">
               <a:ext uri="{FF2B5EF4-FFF2-40B4-BE49-F238E27FC236}">
-                <a16:creationId xmlns:a16="http://schemas.microsoft.com/office/drawing/2014/main" id="{5918BFDC-6E87-4F4F-8072-D02BC371B314}"/>
+                <a16:creationId xmlns:a16="http://schemas.microsoft.com/office/drawing/2014/main" id="{710C7537-6F31-4072-AA12-C1DBED51FB91}"/>
               </a:ext>
             </a:extLst>
           </p:cNvPr>
@@ -3762,7 +3762,7 @@
           <p:cNvPr id="20" name="">
             <a:extLst xmlns:a="http://schemas.openxmlformats.org/drawingml/2006/main">
               <a:ext uri="{FF2B5EF4-FFF2-40B4-BE49-F238E27FC236}">
-                <a16:creationId xmlns:a16="http://schemas.microsoft.com/office/drawing/2014/main" id="{D23110F6-85B0-4528-AEF4-24DA4AAC6A3A}"/>
+                <a16:creationId xmlns:a16="http://schemas.microsoft.com/office/drawing/2014/main" id="{277B1A3C-6FAC-45EE-AD7D-241774AF5F7E}"/>
               </a:ext>
             </a:extLst>
           </p:cNvPr>
@@ -3820,7 +3820,7 @@
           <p:cNvPr id="21" name="">
             <a:extLst xmlns:a="http://schemas.openxmlformats.org/drawingml/2006/main">
               <a:ext uri="{FF2B5EF4-FFF2-40B4-BE49-F238E27FC236}">
-                <a16:creationId xmlns:a16="http://schemas.microsoft.com/office/drawing/2014/main" id="{BC814D5C-7CC6-4452-8F77-2691DCE8BD1C}"/>
+                <a16:creationId xmlns:a16="http://schemas.microsoft.com/office/drawing/2014/main" id="{27D1ABDE-BEB2-433D-AA07-0AB67973899B}"/>
               </a:ext>
             </a:extLst>
           </p:cNvPr>
@@ -3927,7 +3927,7 @@
     </p:spTree>
     <p:extLst>
       <p:ext uri="{BB962C8B-B14F-4D97-AF65-F5344CB8AC3E}">
-        <p14:creationId xmlns:p14="http://schemas.microsoft.com/office/powerpoint/2010/main" val="1973028209"/>
+        <p14:creationId xmlns:p14="http://schemas.microsoft.com/office/powerpoint/2010/main" val="416433736"/>
       </p:ext>
     </p:extLst>
   </p:cSld>
@@ -3958,7 +3958,7 @@
           <p:cNvPr id="1" name="">
             <a:extLst xmlns:a="http://schemas.openxmlformats.org/drawingml/2006/main">
               <a:ext uri="{FF2B5EF4-FFF2-40B4-BE49-F238E27FC236}">
-                <a16:creationId xmlns:a16="http://schemas.microsoft.com/office/drawing/2014/main" id="{5EFC74E4-D397-430C-B7B5-DF7F0073F352}"/>
+                <a16:creationId xmlns:a16="http://schemas.microsoft.com/office/drawing/2014/main" id="{450BC66F-BE14-4AB0-965C-CF33B2D46EF2}"/>
               </a:ext>
             </a:extLst>
           </p:cNvPr>
@@ -3997,7 +3997,7 @@
           <p:nvPr/>
         </p:nvPicPr>
         <p:blipFill>
-          <a:blip xmlns:r="http://schemas.openxmlformats.org/officeDocument/2006/relationships" xmlns:a="http://schemas.openxmlformats.org/drawingml/2006/main" r:embed="Rf85331b5ecd34f1d"/>
+          <a:blip xmlns:r="http://schemas.openxmlformats.org/officeDocument/2006/relationships" xmlns:a="http://schemas.openxmlformats.org/drawingml/2006/main" r:embed="R129db134ce264d46"/>
           <a:stretch xmlns:a="http://schemas.openxmlformats.org/drawingml/2006/main"/>
         </p:blipFill>
         <p:spPr>
@@ -4015,7 +4015,7 @@
           <p:cNvPr id="3" name="">
             <a:extLst xmlns:a="http://schemas.openxmlformats.org/drawingml/2006/main">
               <a:ext uri="{FF2B5EF4-FFF2-40B4-BE49-F238E27FC236}">
-                <a16:creationId xmlns:a16="http://schemas.microsoft.com/office/drawing/2014/main" id="{6D5BA86C-AA4D-455F-80A7-383D5056F2BD}"/>
+                <a16:creationId xmlns:a16="http://schemas.microsoft.com/office/drawing/2014/main" id="{784DC400-A87D-48E9-B64E-F047A5972F05}"/>
               </a:ext>
             </a:extLst>
           </p:cNvPr>
@@ -4053,14 +4053,14 @@
             <a:pPr algn="r">
               <a:defRPr sz="825" b="1">
                 <a:solidFill>
-                  <a:srgbClr val="0E1B3E"/>
+                  <a:srgbClr val="070F26"/>
                 </a:solidFill>
               </a:defRPr>
             </a:pPr>
             <a:r>
               <a:rPr sz="825" b="1">
                 <a:solidFill>
-                  <a:srgbClr val="0E1B3E"/>
+                  <a:srgbClr val="070F26"/>
                 </a:solidFill>
               </a:rPr>
               <a:t>NTT DATA UNIVERSITY</a:t>
@@ -4073,7 +4073,7 @@
           <p:cNvPr id="4" name="">
             <a:extLst xmlns:a="http://schemas.openxmlformats.org/drawingml/2006/main">
               <a:ext uri="{FF2B5EF4-FFF2-40B4-BE49-F238E27FC236}">
-                <a16:creationId xmlns:a16="http://schemas.microsoft.com/office/drawing/2014/main" id="{EFD2151A-6EFA-4F2D-A45A-9E20CAB01CAF}"/>
+                <a16:creationId xmlns:a16="http://schemas.microsoft.com/office/drawing/2014/main" id="{534AD947-5623-4FA7-B101-F688E3119439}"/>
               </a:ext>
             </a:extLst>
           </p:cNvPr>
@@ -4131,7 +4131,7 @@
           <p:cNvPr id="5" name="">
             <a:extLst xmlns:a="http://schemas.openxmlformats.org/drawingml/2006/main">
               <a:ext uri="{FF2B5EF4-FFF2-40B4-BE49-F238E27FC236}">
-                <a16:creationId xmlns:a16="http://schemas.microsoft.com/office/drawing/2014/main" id="{06F496FB-DD16-4C2D-81E6-2D7DEE99511F}"/>
+                <a16:creationId xmlns:a16="http://schemas.microsoft.com/office/drawing/2014/main" id="{12549A88-D5FD-4F52-8DED-1CD660B273E9}"/>
               </a:ext>
             </a:extLst>
           </p:cNvPr>
@@ -4189,7 +4189,7 @@
           <p:cNvPr id="6" name="">
             <a:extLst xmlns:a="http://schemas.openxmlformats.org/drawingml/2006/main">
               <a:ext uri="{FF2B5EF4-FFF2-40B4-BE49-F238E27FC236}">
-                <a16:creationId xmlns:a16="http://schemas.microsoft.com/office/drawing/2014/main" id="{00398814-26E5-4434-8279-2120B883E3A2}"/>
+                <a16:creationId xmlns:a16="http://schemas.microsoft.com/office/drawing/2014/main" id="{9DD1DFA2-D3BB-4266-95C8-3CFE421832F2}"/>
               </a:ext>
             </a:extLst>
           </p:cNvPr>
@@ -4227,14 +4227,14 @@
             <a:pPr algn="r">
               <a:defRPr sz="675" b="1">
                 <a:solidFill>
-                  <a:srgbClr val="0E1B3E"/>
+                  <a:srgbClr val="070F26"/>
                 </a:solidFill>
               </a:defRPr>
             </a:pPr>
             <a:r>
               <a:rPr sz="675" b="1">
                 <a:solidFill>
-                  <a:srgbClr val="0E1B3E"/>
+                  <a:srgbClr val="070F26"/>
                 </a:solidFill>
               </a:rPr>
               <a:t>NTT DATA UNIVERSITY</a:t>
@@ -4247,7 +4247,7 @@
           <p:cNvPr id="7" name="">
             <a:extLst xmlns:a="http://schemas.openxmlformats.org/drawingml/2006/main">
               <a:ext uri="{FF2B5EF4-FFF2-40B4-BE49-F238E27FC236}">
-                <a16:creationId xmlns:a16="http://schemas.microsoft.com/office/drawing/2014/main" id="{2ED79CD1-A5D8-4E6A-ADAD-FBA407925B11}"/>
+                <a16:creationId xmlns:a16="http://schemas.microsoft.com/office/drawing/2014/main" id="{489F1178-3719-4D97-951E-382047B240DE}"/>
               </a:ext>
             </a:extLst>
           </p:cNvPr>
@@ -4305,7 +4305,7 @@
           <p:cNvPr id="8" name="">
             <a:extLst xmlns:a="http://schemas.openxmlformats.org/drawingml/2006/main">
               <a:ext uri="{FF2B5EF4-FFF2-40B4-BE49-F238E27FC236}">
-                <a16:creationId xmlns:a16="http://schemas.microsoft.com/office/drawing/2014/main" id="{E80FA3A5-107E-4468-BDED-CADA7C344AB7}"/>
+                <a16:creationId xmlns:a16="http://schemas.microsoft.com/office/drawing/2014/main" id="{9DDBB1A7-8A18-46C8-AEE1-E49B0AFF2D0F}"/>
               </a:ext>
             </a:extLst>
           </p:cNvPr>
@@ -4343,14 +4343,14 @@
             <a:pPr algn="l">
               <a:defRPr sz="2400" b="0">
                 <a:solidFill>
-                  <a:srgbClr val="0E1B3E"/>
+                  <a:srgbClr val="070F26"/>
                 </a:solidFill>
               </a:defRPr>
             </a:pPr>
             <a:r>
               <a:rPr sz="2400" b="0">
                 <a:solidFill>
-                  <a:srgbClr val="0E1B3E"/>
+                  <a:srgbClr val="070F26"/>
                 </a:solidFill>
               </a:rPr>
               <a:t>O que cobrimos hoje</a:t>
@@ -4363,7 +4363,7 @@
           <p:cNvPr id="9" name="">
             <a:extLst xmlns:a="http://schemas.openxmlformats.org/drawingml/2006/main">
               <a:ext uri="{FF2B5EF4-FFF2-40B4-BE49-F238E27FC236}">
-                <a16:creationId xmlns:a16="http://schemas.microsoft.com/office/drawing/2014/main" id="{2AD4C798-3DF3-4AB5-9D97-980F0309DDB1}"/>
+                <a16:creationId xmlns:a16="http://schemas.microsoft.com/office/drawing/2014/main" id="{CEBD03CE-2570-4543-8880-AEE552CA2765}"/>
               </a:ext>
             </a:extLst>
           </p:cNvPr>
@@ -4421,7 +4421,7 @@
           <p:cNvPr id="10" name="">
             <a:extLst xmlns:a="http://schemas.openxmlformats.org/drawingml/2006/main">
               <a:ext uri="{FF2B5EF4-FFF2-40B4-BE49-F238E27FC236}">
-                <a16:creationId xmlns:a16="http://schemas.microsoft.com/office/drawing/2014/main" id="{F0757792-7805-4A2D-BB31-D409FDAA6EB2}"/>
+                <a16:creationId xmlns:a16="http://schemas.microsoft.com/office/drawing/2014/main" id="{3B2A0DDB-8944-456E-889B-D336E1E12258}"/>
               </a:ext>
             </a:extLst>
           </p:cNvPr>
@@ -4454,7 +4454,7 @@
           <p:cNvPr id="11" name="">
             <a:extLst xmlns:a="http://schemas.openxmlformats.org/drawingml/2006/main">
               <a:ext uri="{FF2B5EF4-FFF2-40B4-BE49-F238E27FC236}">
-                <a16:creationId xmlns:a16="http://schemas.microsoft.com/office/drawing/2014/main" id="{1E215D7F-A7EB-4D7E-9F22-7581EE7C209D}"/>
+                <a16:creationId xmlns:a16="http://schemas.microsoft.com/office/drawing/2014/main" id="{4FC6AB79-4AE5-4EF2-BD52-E628E1B13565}"/>
               </a:ext>
             </a:extLst>
           </p:cNvPr>
@@ -4489,7 +4489,7 @@
           <p:cNvPr id="12" name="">
             <a:extLst xmlns:a="http://schemas.openxmlformats.org/drawingml/2006/main">
               <a:ext uri="{FF2B5EF4-FFF2-40B4-BE49-F238E27FC236}">
-                <a16:creationId xmlns:a16="http://schemas.microsoft.com/office/drawing/2014/main" id="{599FBFC2-0A86-4911-A6C7-1579732F8087}"/>
+                <a16:creationId xmlns:a16="http://schemas.microsoft.com/office/drawing/2014/main" id="{6A37F039-C047-480D-80E2-F713693B2F1A}"/>
               </a:ext>
             </a:extLst>
           </p:cNvPr>
@@ -4547,7 +4547,7 @@
           <p:cNvPr id="13" name="">
             <a:extLst xmlns:a="http://schemas.openxmlformats.org/drawingml/2006/main">
               <a:ext uri="{FF2B5EF4-FFF2-40B4-BE49-F238E27FC236}">
-                <a16:creationId xmlns:a16="http://schemas.microsoft.com/office/drawing/2014/main" id="{A633E132-FDCA-4971-B5FF-4F3F34B9B98B}"/>
+                <a16:creationId xmlns:a16="http://schemas.microsoft.com/office/drawing/2014/main" id="{EBD7BE46-D9A7-4AFF-8AF1-8A3EF1A181D3}"/>
               </a:ext>
             </a:extLst>
           </p:cNvPr>
@@ -4622,7 +4622,7 @@
           <p:cNvPr id="14" name="">
             <a:extLst xmlns:a="http://schemas.openxmlformats.org/drawingml/2006/main">
               <a:ext uri="{FF2B5EF4-FFF2-40B4-BE49-F238E27FC236}">
-                <a16:creationId xmlns:a16="http://schemas.microsoft.com/office/drawing/2014/main" id="{E72B0BFA-A088-4755-A78F-07C6806A7C2F}"/>
+                <a16:creationId xmlns:a16="http://schemas.microsoft.com/office/drawing/2014/main" id="{5B8E3D1A-B9BD-498F-BA40-F944F3DA9CBA}"/>
               </a:ext>
             </a:extLst>
           </p:cNvPr>
@@ -4655,7 +4655,7 @@
           <p:cNvPr id="15" name="">
             <a:extLst xmlns:a="http://schemas.openxmlformats.org/drawingml/2006/main">
               <a:ext uri="{FF2B5EF4-FFF2-40B4-BE49-F238E27FC236}">
-                <a16:creationId xmlns:a16="http://schemas.microsoft.com/office/drawing/2014/main" id="{5F67FD70-2199-4530-BCED-143EB51E7C29}"/>
+                <a16:creationId xmlns:a16="http://schemas.microsoft.com/office/drawing/2014/main" id="{44327FF7-F965-4A96-BF85-DF0AFC01E21D}"/>
               </a:ext>
             </a:extLst>
           </p:cNvPr>
@@ -4690,7 +4690,7 @@
           <p:cNvPr id="16" name="">
             <a:extLst xmlns:a="http://schemas.openxmlformats.org/drawingml/2006/main">
               <a:ext uri="{FF2B5EF4-FFF2-40B4-BE49-F238E27FC236}">
-                <a16:creationId xmlns:a16="http://schemas.microsoft.com/office/drawing/2014/main" id="{1DE7A475-85A0-4A45-8339-9D75A5812D8E}"/>
+                <a16:creationId xmlns:a16="http://schemas.microsoft.com/office/drawing/2014/main" id="{2E8CE668-08AE-411C-9B8D-2C038032F705}"/>
               </a:ext>
             </a:extLst>
           </p:cNvPr>
@@ -4748,7 +4748,7 @@
           <p:cNvPr id="17" name="">
             <a:extLst xmlns:a="http://schemas.openxmlformats.org/drawingml/2006/main">
               <a:ext uri="{FF2B5EF4-FFF2-40B4-BE49-F238E27FC236}">
-                <a16:creationId xmlns:a16="http://schemas.microsoft.com/office/drawing/2014/main" id="{2A1065B0-96BB-4694-B362-3530BE32CE66}"/>
+                <a16:creationId xmlns:a16="http://schemas.microsoft.com/office/drawing/2014/main" id="{849BDC09-9E1C-4868-937E-8398FFA3498B}"/>
               </a:ext>
             </a:extLst>
           </p:cNvPr>
@@ -4823,7 +4823,7 @@
           <p:cNvPr id="18" name="">
             <a:extLst xmlns:a="http://schemas.openxmlformats.org/drawingml/2006/main">
               <a:ext uri="{FF2B5EF4-FFF2-40B4-BE49-F238E27FC236}">
-                <a16:creationId xmlns:a16="http://schemas.microsoft.com/office/drawing/2014/main" id="{531DA0D2-D39E-4950-AC05-EB808615A7AA}"/>
+                <a16:creationId xmlns:a16="http://schemas.microsoft.com/office/drawing/2014/main" id="{2FA57F4B-EBCE-4729-AC56-848E48F46C55}"/>
               </a:ext>
             </a:extLst>
           </p:cNvPr>
@@ -4856,7 +4856,7 @@
           <p:cNvPr id="19" name="">
             <a:extLst xmlns:a="http://schemas.openxmlformats.org/drawingml/2006/main">
               <a:ext uri="{FF2B5EF4-FFF2-40B4-BE49-F238E27FC236}">
-                <a16:creationId xmlns:a16="http://schemas.microsoft.com/office/drawing/2014/main" id="{54EF359D-8893-4712-A526-60E3770D7181}"/>
+                <a16:creationId xmlns:a16="http://schemas.microsoft.com/office/drawing/2014/main" id="{C5C5385E-D9CE-490F-A0AB-04398F3F0202}"/>
               </a:ext>
             </a:extLst>
           </p:cNvPr>
@@ -4891,7 +4891,7 @@
           <p:cNvPr id="20" name="">
             <a:extLst xmlns:a="http://schemas.openxmlformats.org/drawingml/2006/main">
               <a:ext uri="{FF2B5EF4-FFF2-40B4-BE49-F238E27FC236}">
-                <a16:creationId xmlns:a16="http://schemas.microsoft.com/office/drawing/2014/main" id="{F40970B1-7E73-4530-94F0-DFB3F98F3FB6}"/>
+                <a16:creationId xmlns:a16="http://schemas.microsoft.com/office/drawing/2014/main" id="{38EEA61B-BB7B-44EC-BCCF-2530925F3532}"/>
               </a:ext>
             </a:extLst>
           </p:cNvPr>
@@ -4949,7 +4949,7 @@
           <p:cNvPr id="21" name="">
             <a:extLst xmlns:a="http://schemas.openxmlformats.org/drawingml/2006/main">
               <a:ext uri="{FF2B5EF4-FFF2-40B4-BE49-F238E27FC236}">
-                <a16:creationId xmlns:a16="http://schemas.microsoft.com/office/drawing/2014/main" id="{345450A7-D3FE-42BC-B679-65C01DC39F7E}"/>
+                <a16:creationId xmlns:a16="http://schemas.microsoft.com/office/drawing/2014/main" id="{A9664E3F-5E8E-4DD1-84CB-3873FF5949B0}"/>
               </a:ext>
             </a:extLst>
           </p:cNvPr>
@@ -5024,7 +5024,7 @@
           <p:cNvPr id="22" name="">
             <a:extLst xmlns:a="http://schemas.openxmlformats.org/drawingml/2006/main">
               <a:ext uri="{FF2B5EF4-FFF2-40B4-BE49-F238E27FC236}">
-                <a16:creationId xmlns:a16="http://schemas.microsoft.com/office/drawing/2014/main" id="{2F977CEB-C022-40C0-9647-CD81BEB0787D}"/>
+                <a16:creationId xmlns:a16="http://schemas.microsoft.com/office/drawing/2014/main" id="{06F2879E-174B-45F3-BCC7-645DACC717BA}"/>
               </a:ext>
             </a:extLst>
           </p:cNvPr>
@@ -5057,7 +5057,7 @@
           <p:cNvPr id="23" name="">
             <a:extLst xmlns:a="http://schemas.openxmlformats.org/drawingml/2006/main">
               <a:ext uri="{FF2B5EF4-FFF2-40B4-BE49-F238E27FC236}">
-                <a16:creationId xmlns:a16="http://schemas.microsoft.com/office/drawing/2014/main" id="{57D51350-8608-48E0-AAF0-D06922B8B1BB}"/>
+                <a16:creationId xmlns:a16="http://schemas.microsoft.com/office/drawing/2014/main" id="{258E9676-73E3-4D40-844E-A60A98B32E52}"/>
               </a:ext>
             </a:extLst>
           </p:cNvPr>
@@ -5092,7 +5092,7 @@
           <p:cNvPr id="24" name="">
             <a:extLst xmlns:a="http://schemas.openxmlformats.org/drawingml/2006/main">
               <a:ext uri="{FF2B5EF4-FFF2-40B4-BE49-F238E27FC236}">
-                <a16:creationId xmlns:a16="http://schemas.microsoft.com/office/drawing/2014/main" id="{1BD1F41A-E63C-4E11-A4E4-ABEFD8A2EB97}"/>
+                <a16:creationId xmlns:a16="http://schemas.microsoft.com/office/drawing/2014/main" id="{46C18F38-1B9F-4CE9-B4BE-71B110EA8159}"/>
               </a:ext>
             </a:extLst>
           </p:cNvPr>
@@ -5150,7 +5150,7 @@
           <p:cNvPr id="25" name="">
             <a:extLst xmlns:a="http://schemas.openxmlformats.org/drawingml/2006/main">
               <a:ext uri="{FF2B5EF4-FFF2-40B4-BE49-F238E27FC236}">
-                <a16:creationId xmlns:a16="http://schemas.microsoft.com/office/drawing/2014/main" id="{342A9E59-47CE-4925-8C5C-27CCD0998982}"/>
+                <a16:creationId xmlns:a16="http://schemas.microsoft.com/office/drawing/2014/main" id="{2D96592D-310C-4BE6-B20B-B78FEBDA6D7A}"/>
               </a:ext>
             </a:extLst>
           </p:cNvPr>
@@ -5223,7 +5223,7 @@
     </p:spTree>
     <p:extLst>
       <p:ext uri="{BB962C8B-B14F-4D97-AF65-F5344CB8AC3E}">
-        <p14:creationId xmlns:p14="http://schemas.microsoft.com/office/powerpoint/2010/main" val="862933222"/>
+        <p14:creationId xmlns:p14="http://schemas.microsoft.com/office/powerpoint/2010/main" val="1285687478"/>
       </p:ext>
     </p:extLst>
   </p:cSld>
@@ -5254,7 +5254,7 @@
           <p:cNvPr id="1" name="">
             <a:extLst xmlns:a="http://schemas.openxmlformats.org/drawingml/2006/main">
               <a:ext uri="{FF2B5EF4-FFF2-40B4-BE49-F238E27FC236}">
-                <a16:creationId xmlns:a16="http://schemas.microsoft.com/office/drawing/2014/main" id="{66D2E4FE-4036-47BB-8D2D-49D843B67C2F}"/>
+                <a16:creationId xmlns:a16="http://schemas.microsoft.com/office/drawing/2014/main" id="{44039D60-CC15-4C8B-8BC7-1D3CDA5A5AC8}"/>
               </a:ext>
             </a:extLst>
           </p:cNvPr>
@@ -5293,7 +5293,7 @@
           <p:nvPr/>
         </p:nvPicPr>
         <p:blipFill>
-          <a:blip xmlns:r="http://schemas.openxmlformats.org/officeDocument/2006/relationships" xmlns:a="http://schemas.openxmlformats.org/drawingml/2006/main" r:embed="R406f99b7164b43fd"/>
+          <a:blip xmlns:r="http://schemas.openxmlformats.org/officeDocument/2006/relationships" xmlns:a="http://schemas.openxmlformats.org/drawingml/2006/main" r:embed="R53c0d31ae1524568"/>
           <a:stretch xmlns:a="http://schemas.openxmlformats.org/drawingml/2006/main"/>
         </p:blipFill>
         <p:spPr>
@@ -5311,7 +5311,7 @@
           <p:cNvPr id="3" name="">
             <a:extLst xmlns:a="http://schemas.openxmlformats.org/drawingml/2006/main">
               <a:ext uri="{FF2B5EF4-FFF2-40B4-BE49-F238E27FC236}">
-                <a16:creationId xmlns:a16="http://schemas.microsoft.com/office/drawing/2014/main" id="{3E805B81-743B-4D28-8F99-2229510BB496}"/>
+                <a16:creationId xmlns:a16="http://schemas.microsoft.com/office/drawing/2014/main" id="{425F607E-961C-48CD-8D76-4F3635E9DE2D}"/>
               </a:ext>
             </a:extLst>
           </p:cNvPr>
@@ -5349,14 +5349,14 @@
             <a:pPr algn="r">
               <a:defRPr sz="825" b="1">
                 <a:solidFill>
-                  <a:srgbClr val="0E1B3E"/>
+                  <a:srgbClr val="070F26"/>
                 </a:solidFill>
               </a:defRPr>
             </a:pPr>
             <a:r>
               <a:rPr sz="825" b="1">
                 <a:solidFill>
-                  <a:srgbClr val="0E1B3E"/>
+                  <a:srgbClr val="070F26"/>
                 </a:solidFill>
               </a:rPr>
               <a:t>NTT DATA UNIVERSITY</a:t>
@@ -5369,7 +5369,7 @@
           <p:cNvPr id="4" name="">
             <a:extLst xmlns:a="http://schemas.openxmlformats.org/drawingml/2006/main">
               <a:ext uri="{FF2B5EF4-FFF2-40B4-BE49-F238E27FC236}">
-                <a16:creationId xmlns:a16="http://schemas.microsoft.com/office/drawing/2014/main" id="{C57A2314-BD15-4829-9A1C-1DCDD5544DFA}"/>
+                <a16:creationId xmlns:a16="http://schemas.microsoft.com/office/drawing/2014/main" id="{D3AE4150-769A-4FF6-983A-0DD809223F2B}"/>
               </a:ext>
             </a:extLst>
           </p:cNvPr>
@@ -5427,7 +5427,7 @@
           <p:cNvPr id="5" name="">
             <a:extLst xmlns:a="http://schemas.openxmlformats.org/drawingml/2006/main">
               <a:ext uri="{FF2B5EF4-FFF2-40B4-BE49-F238E27FC236}">
-                <a16:creationId xmlns:a16="http://schemas.microsoft.com/office/drawing/2014/main" id="{BAA6E5FE-22D2-4199-B6D5-63625384B6B3}"/>
+                <a16:creationId xmlns:a16="http://schemas.microsoft.com/office/drawing/2014/main" id="{16C71240-5D68-4937-8EF8-35722FD1D5C7}"/>
               </a:ext>
             </a:extLst>
           </p:cNvPr>
@@ -5485,7 +5485,7 @@
           <p:cNvPr id="6" name="">
             <a:extLst xmlns:a="http://schemas.openxmlformats.org/drawingml/2006/main">
               <a:ext uri="{FF2B5EF4-FFF2-40B4-BE49-F238E27FC236}">
-                <a16:creationId xmlns:a16="http://schemas.microsoft.com/office/drawing/2014/main" id="{DC2BAFAA-AE98-4FF4-9F5C-1C196EDCCF1C}"/>
+                <a16:creationId xmlns:a16="http://schemas.microsoft.com/office/drawing/2014/main" id="{70654DCC-F9C4-4C2F-9E5E-514127B963EA}"/>
               </a:ext>
             </a:extLst>
           </p:cNvPr>
@@ -5523,14 +5523,14 @@
             <a:pPr algn="r">
               <a:defRPr sz="675" b="1">
                 <a:solidFill>
-                  <a:srgbClr val="0E1B3E"/>
+                  <a:srgbClr val="070F26"/>
                 </a:solidFill>
               </a:defRPr>
             </a:pPr>
             <a:r>
               <a:rPr sz="675" b="1">
                 <a:solidFill>
-                  <a:srgbClr val="0E1B3E"/>
+                  <a:srgbClr val="070F26"/>
                 </a:solidFill>
               </a:rPr>
               <a:t>NTT DATA UNIVERSITY</a:t>
@@ -5543,7 +5543,7 @@
           <p:cNvPr id="7" name="">
             <a:extLst xmlns:a="http://schemas.openxmlformats.org/drawingml/2006/main">
               <a:ext uri="{FF2B5EF4-FFF2-40B4-BE49-F238E27FC236}">
-                <a16:creationId xmlns:a16="http://schemas.microsoft.com/office/drawing/2014/main" id="{DA4C7925-E963-49CA-BB52-2C5A89693945}"/>
+                <a16:creationId xmlns:a16="http://schemas.microsoft.com/office/drawing/2014/main" id="{38D0F9DF-94D0-480A-848A-812147B0A8BE}"/>
               </a:ext>
             </a:extLst>
           </p:cNvPr>
@@ -5601,7 +5601,7 @@
           <p:cNvPr id="8" name="">
             <a:extLst xmlns:a="http://schemas.openxmlformats.org/drawingml/2006/main">
               <a:ext uri="{FF2B5EF4-FFF2-40B4-BE49-F238E27FC236}">
-                <a16:creationId xmlns:a16="http://schemas.microsoft.com/office/drawing/2014/main" id="{2D05FDF7-9F3A-407F-8DE9-8553FB5A284D}"/>
+                <a16:creationId xmlns:a16="http://schemas.microsoft.com/office/drawing/2014/main" id="{522C3955-95EF-4102-BE3E-CE2169C5CC6C}"/>
               </a:ext>
             </a:extLst>
           </p:cNvPr>
@@ -5639,14 +5639,14 @@
             <a:pPr algn="l">
               <a:defRPr sz="2400" b="0">
                 <a:solidFill>
-                  <a:srgbClr val="0E1B3E"/>
+                  <a:srgbClr val="070F26"/>
                 </a:solidFill>
               </a:defRPr>
             </a:pPr>
             <a:r>
               <a:rPr sz="2400" b="0">
                 <a:solidFill>
-                  <a:srgbClr val="0E1B3E"/>
+                  <a:srgbClr val="070F26"/>
                 </a:solidFill>
               </a:rPr>
               <a:t>Módulo 7 — Armazenamento e Processamento</a:t>
@@ -5659,7 +5659,7 @@
           <p:cNvPr id="9" name="">
             <a:extLst xmlns:a="http://schemas.openxmlformats.org/drawingml/2006/main">
               <a:ext uri="{FF2B5EF4-FFF2-40B4-BE49-F238E27FC236}">
-                <a16:creationId xmlns:a16="http://schemas.microsoft.com/office/drawing/2014/main" id="{14B54C81-40D2-4070-8931-192AE4084101}"/>
+                <a16:creationId xmlns:a16="http://schemas.microsoft.com/office/drawing/2014/main" id="{42638A07-232B-4778-84AD-1E9F76F27B26}"/>
               </a:ext>
             </a:extLst>
           </p:cNvPr>
@@ -5717,7 +5717,7 @@
           <p:cNvPr id="10" name="">
             <a:extLst xmlns:a="http://schemas.openxmlformats.org/drawingml/2006/main">
               <a:ext uri="{FF2B5EF4-FFF2-40B4-BE49-F238E27FC236}">
-                <a16:creationId xmlns:a16="http://schemas.microsoft.com/office/drawing/2014/main" id="{244A95DB-60FC-435A-9E86-F711CB686650}"/>
+                <a16:creationId xmlns:a16="http://schemas.microsoft.com/office/drawing/2014/main" id="{DD712934-EEB9-49BA-A989-FE253E7D3D2A}"/>
               </a:ext>
             </a:extLst>
           </p:cNvPr>
@@ -5750,7 +5750,7 @@
           <p:cNvPr id="11" name="">
             <a:extLst xmlns:a="http://schemas.openxmlformats.org/drawingml/2006/main">
               <a:ext uri="{FF2B5EF4-FFF2-40B4-BE49-F238E27FC236}">
-                <a16:creationId xmlns:a16="http://schemas.microsoft.com/office/drawing/2014/main" id="{D285619B-F54D-478B-B02E-2FF134947B51}"/>
+                <a16:creationId xmlns:a16="http://schemas.microsoft.com/office/drawing/2014/main" id="{D74787C2-1090-4E37-8AA7-948546475714}"/>
               </a:ext>
             </a:extLst>
           </p:cNvPr>
@@ -5785,7 +5785,7 @@
           <p:cNvPr id="12" name="">
             <a:extLst xmlns:a="http://schemas.openxmlformats.org/drawingml/2006/main">
               <a:ext uri="{FF2B5EF4-FFF2-40B4-BE49-F238E27FC236}">
-                <a16:creationId xmlns:a16="http://schemas.microsoft.com/office/drawing/2014/main" id="{160002A3-8525-4173-A36B-3EAAE19E5D79}"/>
+                <a16:creationId xmlns:a16="http://schemas.microsoft.com/office/drawing/2014/main" id="{39FB513B-69B4-4072-8FE1-3BF6AC8DD866}"/>
               </a:ext>
             </a:extLst>
           </p:cNvPr>
@@ -5843,7 +5843,7 @@
           <p:cNvPr id="13" name="">
             <a:extLst xmlns:a="http://schemas.openxmlformats.org/drawingml/2006/main">
               <a:ext uri="{FF2B5EF4-FFF2-40B4-BE49-F238E27FC236}">
-                <a16:creationId xmlns:a16="http://schemas.microsoft.com/office/drawing/2014/main" id="{F5E25CC4-2815-40F4-89E0-BD8E0E0A13B0}"/>
+                <a16:creationId xmlns:a16="http://schemas.microsoft.com/office/drawing/2014/main" id="{AC267DE5-AA63-4E61-83B7-BB7837821AC7}"/>
               </a:ext>
             </a:extLst>
           </p:cNvPr>
@@ -5935,7 +5935,7 @@
           <p:cNvPr id="14" name="">
             <a:extLst xmlns:a="http://schemas.openxmlformats.org/drawingml/2006/main">
               <a:ext uri="{FF2B5EF4-FFF2-40B4-BE49-F238E27FC236}">
-                <a16:creationId xmlns:a16="http://schemas.microsoft.com/office/drawing/2014/main" id="{F51F9358-F92C-4513-9B46-DC7A15E76583}"/>
+                <a16:creationId xmlns:a16="http://schemas.microsoft.com/office/drawing/2014/main" id="{C1167E3A-243A-4C24-960F-21C31FD8F48F}"/>
               </a:ext>
             </a:extLst>
           </p:cNvPr>
@@ -5968,7 +5968,7 @@
           <p:cNvPr id="15" name="">
             <a:extLst xmlns:a="http://schemas.openxmlformats.org/drawingml/2006/main">
               <a:ext uri="{FF2B5EF4-FFF2-40B4-BE49-F238E27FC236}">
-                <a16:creationId xmlns:a16="http://schemas.microsoft.com/office/drawing/2014/main" id="{95DF8C4E-BCA5-4335-8639-EF5FBD00EBB0}"/>
+                <a16:creationId xmlns:a16="http://schemas.microsoft.com/office/drawing/2014/main" id="{CC43DD45-C21A-4625-A945-F99F62F71D1F}"/>
               </a:ext>
             </a:extLst>
           </p:cNvPr>
@@ -6003,7 +6003,7 @@
           <p:cNvPr id="16" name="">
             <a:extLst xmlns:a="http://schemas.openxmlformats.org/drawingml/2006/main">
               <a:ext uri="{FF2B5EF4-FFF2-40B4-BE49-F238E27FC236}">
-                <a16:creationId xmlns:a16="http://schemas.microsoft.com/office/drawing/2014/main" id="{4276F61C-A000-46A3-9B82-629C7A8A2CF1}"/>
+                <a16:creationId xmlns:a16="http://schemas.microsoft.com/office/drawing/2014/main" id="{26B31519-8D97-4021-8605-3E1DE3099AFF}"/>
               </a:ext>
             </a:extLst>
           </p:cNvPr>
@@ -6061,7 +6061,7 @@
           <p:cNvPr id="17" name="">
             <a:extLst xmlns:a="http://schemas.openxmlformats.org/drawingml/2006/main">
               <a:ext uri="{FF2B5EF4-FFF2-40B4-BE49-F238E27FC236}">
-                <a16:creationId xmlns:a16="http://schemas.microsoft.com/office/drawing/2014/main" id="{F261508E-B8B6-449F-BBB3-9606705F65FB}"/>
+                <a16:creationId xmlns:a16="http://schemas.microsoft.com/office/drawing/2014/main" id="{53C2D748-0F3B-4FF6-B8B1-D757F9C2D968}"/>
               </a:ext>
             </a:extLst>
           </p:cNvPr>
@@ -6153,7 +6153,7 @@
           <p:cNvPr id="18" name="">
             <a:extLst xmlns:a="http://schemas.openxmlformats.org/drawingml/2006/main">
               <a:ext uri="{FF2B5EF4-FFF2-40B4-BE49-F238E27FC236}">
-                <a16:creationId xmlns:a16="http://schemas.microsoft.com/office/drawing/2014/main" id="{B33D3FE9-AF49-4D43-819B-E886F0A7A969}"/>
+                <a16:creationId xmlns:a16="http://schemas.microsoft.com/office/drawing/2014/main" id="{F4A7983F-D126-43D1-970B-968AB6DC834C}"/>
               </a:ext>
             </a:extLst>
           </p:cNvPr>
@@ -6186,7 +6186,7 @@
           <p:cNvPr id="19" name="">
             <a:extLst xmlns:a="http://schemas.openxmlformats.org/drawingml/2006/main">
               <a:ext uri="{FF2B5EF4-FFF2-40B4-BE49-F238E27FC236}">
-                <a16:creationId xmlns:a16="http://schemas.microsoft.com/office/drawing/2014/main" id="{3ECB515F-0382-4E8B-BECB-6E69098A0964}"/>
+                <a16:creationId xmlns:a16="http://schemas.microsoft.com/office/drawing/2014/main" id="{C51E1BA3-947D-459B-BCE0-CE22C9124E81}"/>
               </a:ext>
             </a:extLst>
           </p:cNvPr>
@@ -6221,7 +6221,7 @@
           <p:cNvPr id="20" name="">
             <a:extLst xmlns:a="http://schemas.openxmlformats.org/drawingml/2006/main">
               <a:ext uri="{FF2B5EF4-FFF2-40B4-BE49-F238E27FC236}">
-                <a16:creationId xmlns:a16="http://schemas.microsoft.com/office/drawing/2014/main" id="{04337C89-B87A-4A01-B2B4-6E471643C9FF}"/>
+                <a16:creationId xmlns:a16="http://schemas.microsoft.com/office/drawing/2014/main" id="{56FC1FF3-453E-4CDB-85DB-04F9108A46B0}"/>
               </a:ext>
             </a:extLst>
           </p:cNvPr>
@@ -6279,7 +6279,7 @@
           <p:cNvPr id="21" name="">
             <a:extLst xmlns:a="http://schemas.openxmlformats.org/drawingml/2006/main">
               <a:ext uri="{FF2B5EF4-FFF2-40B4-BE49-F238E27FC236}">
-                <a16:creationId xmlns:a16="http://schemas.microsoft.com/office/drawing/2014/main" id="{ADF638ED-3EB0-401E-B4B5-2B2F140AFD38}"/>
+                <a16:creationId xmlns:a16="http://schemas.microsoft.com/office/drawing/2014/main" id="{C4A2713D-1C81-402A-A04C-E5867D72B7D7}"/>
               </a:ext>
             </a:extLst>
           </p:cNvPr>
@@ -6369,7 +6369,7 @@
     </p:spTree>
     <p:extLst>
       <p:ext uri="{BB962C8B-B14F-4D97-AF65-F5344CB8AC3E}">
-        <p14:creationId xmlns:p14="http://schemas.microsoft.com/office/powerpoint/2010/main" val="1289553683"/>
+        <p14:creationId xmlns:p14="http://schemas.microsoft.com/office/powerpoint/2010/main" val="1808128126"/>
       </p:ext>
     </p:extLst>
   </p:cSld>
@@ -6382,7 +6382,7 @@
     <p:bg>
       <p:bgPr>
         <a:solidFill xmlns:a="http://schemas.openxmlformats.org/drawingml/2006/main">
-          <a:srgbClr val="0E1B3E"/>
+          <a:srgbClr val="070F26"/>
         </a:solidFill>
       </p:bgPr>
     </p:bg>
@@ -6400,7 +6400,7 @@
           <p:cNvPr id="1" name="">
             <a:extLst xmlns:a="http://schemas.openxmlformats.org/drawingml/2006/main">
               <a:ext uri="{FF2B5EF4-FFF2-40B4-BE49-F238E27FC236}">
-                <a16:creationId xmlns:a16="http://schemas.microsoft.com/office/drawing/2014/main" id="{9AF848FE-E2FD-4E5E-8287-44B3456BE6B8}"/>
+                <a16:creationId xmlns:a16="http://schemas.microsoft.com/office/drawing/2014/main" id="{3A678771-48C4-41BE-9A75-6345219AFFC0}"/>
               </a:ext>
             </a:extLst>
           </p:cNvPr>
@@ -6418,7 +6418,7 @@
             <a:avLst/>
           </a:prstGeom>
           <a:solidFill xmlns:a="http://schemas.openxmlformats.org/drawingml/2006/main">
-            <a:srgbClr val="0E1B3E"/>
+            <a:srgbClr val="070F26"/>
           </a:solidFill>
           <a:ln xmlns:a="http://schemas.openxmlformats.org/drawingml/2006/main" w="0">
             <a:solidFill>
@@ -6439,7 +6439,7 @@
           <p:nvPr/>
         </p:nvPicPr>
         <p:blipFill>
-          <a:blip xmlns:r="http://schemas.openxmlformats.org/officeDocument/2006/relationships" xmlns:a="http://schemas.openxmlformats.org/drawingml/2006/main" r:embed="Re21792cf7ff84288"/>
+          <a:blip xmlns:r="http://schemas.openxmlformats.org/officeDocument/2006/relationships" xmlns:a="http://schemas.openxmlformats.org/drawingml/2006/main" r:embed="R72d255a7d8fc4eef"/>
           <a:stretch xmlns:a="http://schemas.openxmlformats.org/drawingml/2006/main"/>
         </p:blipFill>
         <p:spPr>
@@ -6457,7 +6457,7 @@
           <p:cNvPr id="3" name="">
             <a:extLst xmlns:a="http://schemas.openxmlformats.org/drawingml/2006/main">
               <a:ext uri="{FF2B5EF4-FFF2-40B4-BE49-F238E27FC236}">
-                <a16:creationId xmlns:a16="http://schemas.microsoft.com/office/drawing/2014/main" id="{B48A53DE-3C92-412D-AD39-CB7E62DE7712}"/>
+                <a16:creationId xmlns:a16="http://schemas.microsoft.com/office/drawing/2014/main" id="{D7E0A536-88E0-4D8D-B9AD-76404EDC5E5C}"/>
               </a:ext>
             </a:extLst>
           </p:cNvPr>
@@ -6515,7 +6515,7 @@
           <p:cNvPr id="4" name="">
             <a:extLst xmlns:a="http://schemas.openxmlformats.org/drawingml/2006/main">
               <a:ext uri="{FF2B5EF4-FFF2-40B4-BE49-F238E27FC236}">
-                <a16:creationId xmlns:a16="http://schemas.microsoft.com/office/drawing/2014/main" id="{1A5BB270-558D-4E5B-8E2E-DF12D36215F4}"/>
+                <a16:creationId xmlns:a16="http://schemas.microsoft.com/office/drawing/2014/main" id="{6DD5B1A3-7F89-4266-9B0F-AED897984625}"/>
               </a:ext>
             </a:extLst>
           </p:cNvPr>
@@ -6573,7 +6573,7 @@
           <p:cNvPr id="5" name="">
             <a:extLst xmlns:a="http://schemas.openxmlformats.org/drawingml/2006/main">
               <a:ext uri="{FF2B5EF4-FFF2-40B4-BE49-F238E27FC236}">
-                <a16:creationId xmlns:a16="http://schemas.microsoft.com/office/drawing/2014/main" id="{8DDF54D8-A131-4623-B1BA-3B218E9FF9D1}"/>
+                <a16:creationId xmlns:a16="http://schemas.microsoft.com/office/drawing/2014/main" id="{D542E8EA-A491-4A70-AEF7-42B2D971F01E}"/>
               </a:ext>
             </a:extLst>
           </p:cNvPr>
@@ -6635,7 +6635,7 @@
           <p:nvPr/>
         </p:nvPicPr>
         <p:blipFill>
-          <a:blip xmlns:r="http://schemas.openxmlformats.org/officeDocument/2006/relationships" xmlns:a="http://schemas.openxmlformats.org/drawingml/2006/main" r:embed="Re221daa91e814255"/>
+          <a:blip xmlns:r="http://schemas.openxmlformats.org/officeDocument/2006/relationships" xmlns:a="http://schemas.openxmlformats.org/drawingml/2006/main" r:embed="R4f2719bc25ee4135"/>
           <a:stretch xmlns:a="http://schemas.openxmlformats.org/drawingml/2006/main"/>
         </p:blipFill>
         <p:spPr>
@@ -6653,7 +6653,7 @@
           <p:cNvPr id="7" name="">
             <a:extLst xmlns:a="http://schemas.openxmlformats.org/drawingml/2006/main">
               <a:ext uri="{FF2B5EF4-FFF2-40B4-BE49-F238E27FC236}">
-                <a16:creationId xmlns:a16="http://schemas.microsoft.com/office/drawing/2014/main" id="{A5B016B7-8472-4D78-B169-3870FAE09F9B}"/>
+                <a16:creationId xmlns:a16="http://schemas.microsoft.com/office/drawing/2014/main" id="{967C2D83-DDF4-47E9-AB6E-AA2909973852}"/>
               </a:ext>
             </a:extLst>
           </p:cNvPr>
@@ -6711,7 +6711,7 @@
           <p:cNvPr id="8" name="">
             <a:extLst xmlns:a="http://schemas.openxmlformats.org/drawingml/2006/main">
               <a:ext uri="{FF2B5EF4-FFF2-40B4-BE49-F238E27FC236}">
-                <a16:creationId xmlns:a16="http://schemas.microsoft.com/office/drawing/2014/main" id="{E2F027BC-DAC3-4754-8753-7757970675F6}"/>
+                <a16:creationId xmlns:a16="http://schemas.microsoft.com/office/drawing/2014/main" id="{44EEC649-1E20-419D-AFD4-B7A8572C0483}"/>
               </a:ext>
             </a:extLst>
           </p:cNvPr>
@@ -6767,7 +6767,7 @@
     </p:spTree>
     <p:extLst>
       <p:ext uri="{BB962C8B-B14F-4D97-AF65-F5344CB8AC3E}">
-        <p14:creationId xmlns:p14="http://schemas.microsoft.com/office/powerpoint/2010/main" val="1858892322"/>
+        <p14:creationId xmlns:p14="http://schemas.microsoft.com/office/powerpoint/2010/main" val="1882617261"/>
       </p:ext>
     </p:extLst>
   </p:cSld>
@@ -6798,7 +6798,7 @@
           <p:cNvPr id="1" name="">
             <a:extLst xmlns:a="http://schemas.openxmlformats.org/drawingml/2006/main">
               <a:ext uri="{FF2B5EF4-FFF2-40B4-BE49-F238E27FC236}">
-                <a16:creationId xmlns:a16="http://schemas.microsoft.com/office/drawing/2014/main" id="{9F5006CF-1BF7-474F-BD41-8031858A4306}"/>
+                <a16:creationId xmlns:a16="http://schemas.microsoft.com/office/drawing/2014/main" id="{CC7F883A-68C8-4D2E-BD72-58606C247A6A}"/>
               </a:ext>
             </a:extLst>
           </p:cNvPr>
@@ -6837,7 +6837,7 @@
           <p:nvPr/>
         </p:nvPicPr>
         <p:blipFill>
-          <a:blip xmlns:r="http://schemas.openxmlformats.org/officeDocument/2006/relationships" xmlns:a="http://schemas.openxmlformats.org/drawingml/2006/main" r:embed="R96273654f3214b97"/>
+          <a:blip xmlns:r="http://schemas.openxmlformats.org/officeDocument/2006/relationships" xmlns:a="http://schemas.openxmlformats.org/drawingml/2006/main" r:embed="Ra98dcc12becc4b7f"/>
           <a:stretch xmlns:a="http://schemas.openxmlformats.org/drawingml/2006/main"/>
         </p:blipFill>
         <p:spPr>
@@ -6855,7 +6855,7 @@
           <p:cNvPr id="3" name="">
             <a:extLst xmlns:a="http://schemas.openxmlformats.org/drawingml/2006/main">
               <a:ext uri="{FF2B5EF4-FFF2-40B4-BE49-F238E27FC236}">
-                <a16:creationId xmlns:a16="http://schemas.microsoft.com/office/drawing/2014/main" id="{774B14BE-B112-4C35-B4EC-66F36C038931}"/>
+                <a16:creationId xmlns:a16="http://schemas.microsoft.com/office/drawing/2014/main" id="{B2B7B0F7-5449-45B9-BD84-6C969A515904}"/>
               </a:ext>
             </a:extLst>
           </p:cNvPr>
@@ -6893,14 +6893,14 @@
             <a:pPr algn="r">
               <a:defRPr sz="825" b="1">
                 <a:solidFill>
-                  <a:srgbClr val="0E1B3E"/>
+                  <a:srgbClr val="070F26"/>
                 </a:solidFill>
               </a:defRPr>
             </a:pPr>
             <a:r>
               <a:rPr sz="825" b="1">
                 <a:solidFill>
-                  <a:srgbClr val="0E1B3E"/>
+                  <a:srgbClr val="070F26"/>
                 </a:solidFill>
               </a:rPr>
               <a:t>NTT DATA UNIVERSITY</a:t>
@@ -6913,7 +6913,7 @@
           <p:cNvPr id="4" name="">
             <a:extLst xmlns:a="http://schemas.openxmlformats.org/drawingml/2006/main">
               <a:ext uri="{FF2B5EF4-FFF2-40B4-BE49-F238E27FC236}">
-                <a16:creationId xmlns:a16="http://schemas.microsoft.com/office/drawing/2014/main" id="{FCCE115F-8130-4AAE-9239-114C8CA60B69}"/>
+                <a16:creationId xmlns:a16="http://schemas.microsoft.com/office/drawing/2014/main" id="{886DEF84-AD69-4E73-8B1C-A456760D4B76}"/>
               </a:ext>
             </a:extLst>
           </p:cNvPr>
@@ -6971,7 +6971,7 @@
           <p:cNvPr id="5" name="">
             <a:extLst xmlns:a="http://schemas.openxmlformats.org/drawingml/2006/main">
               <a:ext uri="{FF2B5EF4-FFF2-40B4-BE49-F238E27FC236}">
-                <a16:creationId xmlns:a16="http://schemas.microsoft.com/office/drawing/2014/main" id="{42FE7D9E-47D8-4AF4-BA65-56169054E05C}"/>
+                <a16:creationId xmlns:a16="http://schemas.microsoft.com/office/drawing/2014/main" id="{95653077-0538-42B3-AEF9-491C00A5356E}"/>
               </a:ext>
             </a:extLst>
           </p:cNvPr>
@@ -7029,7 +7029,7 @@
           <p:cNvPr id="6" name="">
             <a:extLst xmlns:a="http://schemas.openxmlformats.org/drawingml/2006/main">
               <a:ext uri="{FF2B5EF4-FFF2-40B4-BE49-F238E27FC236}">
-                <a16:creationId xmlns:a16="http://schemas.microsoft.com/office/drawing/2014/main" id="{E3775ABF-1AE3-4D98-819B-1363709B8B8F}"/>
+                <a16:creationId xmlns:a16="http://schemas.microsoft.com/office/drawing/2014/main" id="{DADAD0B9-258E-459D-ACC5-2F70DAB26791}"/>
               </a:ext>
             </a:extLst>
           </p:cNvPr>
@@ -7067,14 +7067,14 @@
             <a:pPr algn="r">
               <a:defRPr sz="675" b="1">
                 <a:solidFill>
-                  <a:srgbClr val="0E1B3E"/>
+                  <a:srgbClr val="070F26"/>
                 </a:solidFill>
               </a:defRPr>
             </a:pPr>
             <a:r>
               <a:rPr sz="675" b="1">
                 <a:solidFill>
-                  <a:srgbClr val="0E1B3E"/>
+                  <a:srgbClr val="070F26"/>
                 </a:solidFill>
               </a:rPr>
               <a:t>NTT DATA UNIVERSITY</a:t>
@@ -7087,7 +7087,7 @@
           <p:cNvPr id="7" name="">
             <a:extLst xmlns:a="http://schemas.openxmlformats.org/drawingml/2006/main">
               <a:ext uri="{FF2B5EF4-FFF2-40B4-BE49-F238E27FC236}">
-                <a16:creationId xmlns:a16="http://schemas.microsoft.com/office/drawing/2014/main" id="{32273EA1-B09C-4715-B219-12ADFC29C9CD}"/>
+                <a16:creationId xmlns:a16="http://schemas.microsoft.com/office/drawing/2014/main" id="{65FBFCFE-B9B5-4005-8A24-DA4203C1691D}"/>
               </a:ext>
             </a:extLst>
           </p:cNvPr>
@@ -7145,7 +7145,7 @@
           <p:cNvPr id="8" name="">
             <a:extLst xmlns:a="http://schemas.openxmlformats.org/drawingml/2006/main">
               <a:ext uri="{FF2B5EF4-FFF2-40B4-BE49-F238E27FC236}">
-                <a16:creationId xmlns:a16="http://schemas.microsoft.com/office/drawing/2014/main" id="{47DE4819-EF11-4934-9D2D-8E6D928AB312}"/>
+                <a16:creationId xmlns:a16="http://schemas.microsoft.com/office/drawing/2014/main" id="{9B175A3E-281F-43A5-B01B-F34CD4D682F2}"/>
               </a:ext>
             </a:extLst>
           </p:cNvPr>
@@ -7183,14 +7183,14 @@
             <a:pPr algn="l">
               <a:defRPr sz="2400" b="0">
                 <a:solidFill>
-                  <a:srgbClr val="0E1B3E"/>
+                  <a:srgbClr val="070F26"/>
                 </a:solidFill>
               </a:defRPr>
             </a:pPr>
             <a:r>
               <a:rPr sz="2400" b="0">
                 <a:solidFill>
-                  <a:srgbClr val="0E1B3E"/>
+                  <a:srgbClr val="070F26"/>
                 </a:solidFill>
               </a:rPr>
               <a:t>Hoje vocês colocam o pipeline para rodar sozinho</a:t>
@@ -7203,7 +7203,7 @@
           <p:cNvPr id="9" name="">
             <a:extLst xmlns:a="http://schemas.openxmlformats.org/drawingml/2006/main">
               <a:ext uri="{FF2B5EF4-FFF2-40B4-BE49-F238E27FC236}">
-                <a16:creationId xmlns:a16="http://schemas.microsoft.com/office/drawing/2014/main" id="{FA3679B0-6F4B-4F61-BE3F-50A96E0F5868}"/>
+                <a16:creationId xmlns:a16="http://schemas.microsoft.com/office/drawing/2014/main" id="{BA80AC51-EFDE-40A1-8180-7DFF76AFF075}"/>
               </a:ext>
             </a:extLst>
           </p:cNvPr>
@@ -7261,7 +7261,7 @@
           <p:cNvPr id="10" name="">
             <a:extLst xmlns:a="http://schemas.openxmlformats.org/drawingml/2006/main">
               <a:ext uri="{FF2B5EF4-FFF2-40B4-BE49-F238E27FC236}">
-                <a16:creationId xmlns:a16="http://schemas.microsoft.com/office/drawing/2014/main" id="{9F02C457-D846-4638-A09B-C0CDCD8BA35E}"/>
+                <a16:creationId xmlns:a16="http://schemas.microsoft.com/office/drawing/2014/main" id="{507BD01B-483F-4020-9217-20A482C817C4}"/>
               </a:ext>
             </a:extLst>
           </p:cNvPr>
@@ -7294,7 +7294,7 @@
           <p:cNvPr id="11" name="">
             <a:extLst xmlns:a="http://schemas.openxmlformats.org/drawingml/2006/main">
               <a:ext uri="{FF2B5EF4-FFF2-40B4-BE49-F238E27FC236}">
-                <a16:creationId xmlns:a16="http://schemas.microsoft.com/office/drawing/2014/main" id="{08D92599-56AB-4C8A-8022-03DFE067721E}"/>
+                <a16:creationId xmlns:a16="http://schemas.microsoft.com/office/drawing/2014/main" id="{B06595C9-CFC3-4EC7-8EF7-25644BE5C624}"/>
               </a:ext>
             </a:extLst>
           </p:cNvPr>
@@ -7329,7 +7329,7 @@
           <p:cNvPr id="12" name="">
             <a:extLst xmlns:a="http://schemas.openxmlformats.org/drawingml/2006/main">
               <a:ext uri="{FF2B5EF4-FFF2-40B4-BE49-F238E27FC236}">
-                <a16:creationId xmlns:a16="http://schemas.microsoft.com/office/drawing/2014/main" id="{04A603CB-3E08-41E4-ACEB-2E1A957374F4}"/>
+                <a16:creationId xmlns:a16="http://schemas.microsoft.com/office/drawing/2014/main" id="{2931B5ED-CBD5-44A1-A66B-F99946983EA2}"/>
               </a:ext>
             </a:extLst>
           </p:cNvPr>
@@ -7387,7 +7387,7 @@
           <p:cNvPr id="13" name="">
             <a:extLst xmlns:a="http://schemas.openxmlformats.org/drawingml/2006/main">
               <a:ext uri="{FF2B5EF4-FFF2-40B4-BE49-F238E27FC236}">
-                <a16:creationId xmlns:a16="http://schemas.microsoft.com/office/drawing/2014/main" id="{3A8ACB6C-54D4-4E7C-B48B-F08BAA6D9E0E}"/>
+                <a16:creationId xmlns:a16="http://schemas.microsoft.com/office/drawing/2014/main" id="{86984CD9-519E-4351-9347-8072867B9425}"/>
               </a:ext>
             </a:extLst>
           </p:cNvPr>
@@ -7479,7 +7479,7 @@
           <p:cNvPr id="14" name="">
             <a:extLst xmlns:a="http://schemas.openxmlformats.org/drawingml/2006/main">
               <a:ext uri="{FF2B5EF4-FFF2-40B4-BE49-F238E27FC236}">
-                <a16:creationId xmlns:a16="http://schemas.microsoft.com/office/drawing/2014/main" id="{2E80A634-7A18-4F40-BCD8-38227231601D}"/>
+                <a16:creationId xmlns:a16="http://schemas.microsoft.com/office/drawing/2014/main" id="{EDF44884-5478-496E-AB55-EB8D9B59C7A7}"/>
               </a:ext>
             </a:extLst>
           </p:cNvPr>
@@ -7512,7 +7512,7 @@
           <p:cNvPr id="15" name="">
             <a:extLst xmlns:a="http://schemas.openxmlformats.org/drawingml/2006/main">
               <a:ext uri="{FF2B5EF4-FFF2-40B4-BE49-F238E27FC236}">
-                <a16:creationId xmlns:a16="http://schemas.microsoft.com/office/drawing/2014/main" id="{5C33D0A4-E392-43CD-9099-1FE821B84645}"/>
+                <a16:creationId xmlns:a16="http://schemas.microsoft.com/office/drawing/2014/main" id="{97649DCD-D11B-434C-BF30-F94215DAB256}"/>
               </a:ext>
             </a:extLst>
           </p:cNvPr>
@@ -7547,7 +7547,7 @@
           <p:cNvPr id="16" name="">
             <a:extLst xmlns:a="http://schemas.openxmlformats.org/drawingml/2006/main">
               <a:ext uri="{FF2B5EF4-FFF2-40B4-BE49-F238E27FC236}">
-                <a16:creationId xmlns:a16="http://schemas.microsoft.com/office/drawing/2014/main" id="{E2598A65-4165-4FDE-8EA1-228D96B60A50}"/>
+                <a16:creationId xmlns:a16="http://schemas.microsoft.com/office/drawing/2014/main" id="{19591ABD-B096-45B6-9D37-AA201DF353CE}"/>
               </a:ext>
             </a:extLst>
           </p:cNvPr>
@@ -7605,7 +7605,7 @@
           <p:cNvPr id="17" name="">
             <a:extLst xmlns:a="http://schemas.openxmlformats.org/drawingml/2006/main">
               <a:ext uri="{FF2B5EF4-FFF2-40B4-BE49-F238E27FC236}">
-                <a16:creationId xmlns:a16="http://schemas.microsoft.com/office/drawing/2014/main" id="{A482DCF7-A788-4BB9-90F6-39D1677CD473}"/>
+                <a16:creationId xmlns:a16="http://schemas.microsoft.com/office/drawing/2014/main" id="{0FB3CEAE-37E2-443E-869C-93CD32B8E880}"/>
               </a:ext>
             </a:extLst>
           </p:cNvPr>
@@ -7697,7 +7697,7 @@
           <p:cNvPr id="18" name="">
             <a:extLst xmlns:a="http://schemas.openxmlformats.org/drawingml/2006/main">
               <a:ext uri="{FF2B5EF4-FFF2-40B4-BE49-F238E27FC236}">
-                <a16:creationId xmlns:a16="http://schemas.microsoft.com/office/drawing/2014/main" id="{625082B0-2B5E-4D95-A892-0748BAAB5C39}"/>
+                <a16:creationId xmlns:a16="http://schemas.microsoft.com/office/drawing/2014/main" id="{E3858D8E-A10F-4162-9BA1-C71D8C80F195}"/>
               </a:ext>
             </a:extLst>
           </p:cNvPr>
@@ -7730,7 +7730,7 @@
           <p:cNvPr id="19" name="">
             <a:extLst xmlns:a="http://schemas.openxmlformats.org/drawingml/2006/main">
               <a:ext uri="{FF2B5EF4-FFF2-40B4-BE49-F238E27FC236}">
-                <a16:creationId xmlns:a16="http://schemas.microsoft.com/office/drawing/2014/main" id="{303E582E-537B-4274-AEEC-8D07F39C7954}"/>
+                <a16:creationId xmlns:a16="http://schemas.microsoft.com/office/drawing/2014/main" id="{46897376-D840-47FA-B71A-2ADC397CDE2C}"/>
               </a:ext>
             </a:extLst>
           </p:cNvPr>
@@ -7765,7 +7765,7 @@
           <p:cNvPr id="20" name="">
             <a:extLst xmlns:a="http://schemas.openxmlformats.org/drawingml/2006/main">
               <a:ext uri="{FF2B5EF4-FFF2-40B4-BE49-F238E27FC236}">
-                <a16:creationId xmlns:a16="http://schemas.microsoft.com/office/drawing/2014/main" id="{442D5943-DBF9-4D23-934E-863FFB8315C0}"/>
+                <a16:creationId xmlns:a16="http://schemas.microsoft.com/office/drawing/2014/main" id="{F18B095E-3452-4434-857D-80DE23C9758E}"/>
               </a:ext>
             </a:extLst>
           </p:cNvPr>
@@ -7823,7 +7823,7 @@
           <p:cNvPr id="21" name="">
             <a:extLst xmlns:a="http://schemas.openxmlformats.org/drawingml/2006/main">
               <a:ext uri="{FF2B5EF4-FFF2-40B4-BE49-F238E27FC236}">
-                <a16:creationId xmlns:a16="http://schemas.microsoft.com/office/drawing/2014/main" id="{AFE9DDEA-3EE9-4AA7-8DF8-1B67D970688E}"/>
+                <a16:creationId xmlns:a16="http://schemas.microsoft.com/office/drawing/2014/main" id="{C89AD56B-F1C5-47A2-8130-C56B65EB0673}"/>
               </a:ext>
             </a:extLst>
           </p:cNvPr>
@@ -7913,7 +7913,7 @@
     </p:spTree>
     <p:extLst>
       <p:ext uri="{BB962C8B-B14F-4D97-AF65-F5344CB8AC3E}">
-        <p14:creationId xmlns:p14="http://schemas.microsoft.com/office/powerpoint/2010/main" val="1601900487"/>
+        <p14:creationId xmlns:p14="http://schemas.microsoft.com/office/powerpoint/2010/main" val="1014153864"/>
       </p:ext>
     </p:extLst>
   </p:cSld>
@@ -7926,7 +7926,7 @@
     <p:bg>
       <p:bgPr>
         <a:solidFill xmlns:a="http://schemas.openxmlformats.org/drawingml/2006/main">
-          <a:srgbClr val="0E1B3E"/>
+          <a:srgbClr val="070F26"/>
         </a:solidFill>
       </p:bgPr>
     </p:bg>
@@ -7944,7 +7944,7 @@
           <p:cNvPr id="1" name="">
             <a:extLst xmlns:a="http://schemas.openxmlformats.org/drawingml/2006/main">
               <a:ext uri="{FF2B5EF4-FFF2-40B4-BE49-F238E27FC236}">
-                <a16:creationId xmlns:a16="http://schemas.microsoft.com/office/drawing/2014/main" id="{DC47A639-1957-478A-9AB1-0092398AC3CC}"/>
+                <a16:creationId xmlns:a16="http://schemas.microsoft.com/office/drawing/2014/main" id="{0610F32B-2D7F-4DDD-83E5-C12F0A8B8113}"/>
               </a:ext>
             </a:extLst>
           </p:cNvPr>
@@ -7962,7 +7962,7 @@
             <a:avLst/>
           </a:prstGeom>
           <a:solidFill xmlns:a="http://schemas.openxmlformats.org/drawingml/2006/main">
-            <a:srgbClr val="0E1B3E"/>
+            <a:srgbClr val="070F26"/>
           </a:solidFill>
           <a:ln xmlns:a="http://schemas.openxmlformats.org/drawingml/2006/main" w="0">
             <a:solidFill>
@@ -7983,7 +7983,7 @@
           <p:nvPr/>
         </p:nvPicPr>
         <p:blipFill>
-          <a:blip xmlns:r="http://schemas.openxmlformats.org/officeDocument/2006/relationships" xmlns:a="http://schemas.openxmlformats.org/drawingml/2006/main" r:embed="R65313afed17545ca"/>
+          <a:blip xmlns:r="http://schemas.openxmlformats.org/officeDocument/2006/relationships" xmlns:a="http://schemas.openxmlformats.org/drawingml/2006/main" r:embed="R4eb617a997824ea7"/>
           <a:stretch xmlns:a="http://schemas.openxmlformats.org/drawingml/2006/main"/>
         </p:blipFill>
         <p:spPr>
@@ -8001,7 +8001,7 @@
           <p:cNvPr id="3" name="">
             <a:extLst xmlns:a="http://schemas.openxmlformats.org/drawingml/2006/main">
               <a:ext uri="{FF2B5EF4-FFF2-40B4-BE49-F238E27FC236}">
-                <a16:creationId xmlns:a16="http://schemas.microsoft.com/office/drawing/2014/main" id="{01F251C6-9514-46B1-967D-A2A2869E3894}"/>
+                <a16:creationId xmlns:a16="http://schemas.microsoft.com/office/drawing/2014/main" id="{1D68F286-A867-45BF-9F84-3405986EB21C}"/>
               </a:ext>
             </a:extLst>
           </p:cNvPr>
@@ -8059,7 +8059,7 @@
           <p:cNvPr id="4" name="">
             <a:extLst xmlns:a="http://schemas.openxmlformats.org/drawingml/2006/main">
               <a:ext uri="{FF2B5EF4-FFF2-40B4-BE49-F238E27FC236}">
-                <a16:creationId xmlns:a16="http://schemas.microsoft.com/office/drawing/2014/main" id="{54AC8911-A602-439A-946D-FD5C2E63725E}"/>
+                <a16:creationId xmlns:a16="http://schemas.microsoft.com/office/drawing/2014/main" id="{072E7B11-0DBC-43EC-8786-825DD7B03564}"/>
               </a:ext>
             </a:extLst>
           </p:cNvPr>
@@ -8117,7 +8117,7 @@
           <p:cNvPr id="5" name="">
             <a:extLst xmlns:a="http://schemas.openxmlformats.org/drawingml/2006/main">
               <a:ext uri="{FF2B5EF4-FFF2-40B4-BE49-F238E27FC236}">
-                <a16:creationId xmlns:a16="http://schemas.microsoft.com/office/drawing/2014/main" id="{F018439A-2996-4338-8758-E897D02258B6}"/>
+                <a16:creationId xmlns:a16="http://schemas.microsoft.com/office/drawing/2014/main" id="{668FFA97-982B-44DB-88B9-3B53030CDAA4}"/>
               </a:ext>
             </a:extLst>
           </p:cNvPr>
@@ -8175,7 +8175,7 @@
           <p:cNvPr id="6" name="">
             <a:extLst xmlns:a="http://schemas.openxmlformats.org/drawingml/2006/main">
               <a:ext uri="{FF2B5EF4-FFF2-40B4-BE49-F238E27FC236}">
-                <a16:creationId xmlns:a16="http://schemas.microsoft.com/office/drawing/2014/main" id="{15BA9F69-D855-4F48-A1FD-D550855BE4B1}"/>
+                <a16:creationId xmlns:a16="http://schemas.microsoft.com/office/drawing/2014/main" id="{C742C04E-1552-4712-B22F-982415D11DF2}"/>
               </a:ext>
             </a:extLst>
           </p:cNvPr>
@@ -8237,13 +8237,13 @@
           <p:nvPr/>
         </p:nvPicPr>
         <p:blipFill>
-          <a:blip xmlns:r="http://schemas.openxmlformats.org/officeDocument/2006/relationships" xmlns:a="http://schemas.openxmlformats.org/drawingml/2006/main" r:embed="R7579d2be09af4ac8"/>
+          <a:blip xmlns:r="http://schemas.openxmlformats.org/officeDocument/2006/relationships" xmlns:a="http://schemas.openxmlformats.org/drawingml/2006/main" r:embed="Rc17884f22ea641b1"/>
           <a:stretch xmlns:a="http://schemas.openxmlformats.org/drawingml/2006/main"/>
         </p:blipFill>
         <p:spPr>
           <a:xfrm xmlns:a="http://schemas.openxmlformats.org/drawingml/2006/main">
-            <a:off x="476250" y="1257300"/>
-            <a:ext cx="2667000" cy="4533900"/>
+            <a:off x="0" y="1746250"/>
+            <a:ext cx="2667000" cy="3556000"/>
           </a:xfrm>
           <a:prstGeom xmlns:a="http://schemas.openxmlformats.org/drawingml/2006/main" prst="rect">
             <a:avLst/>
@@ -8255,7 +8255,7 @@
           <p:cNvPr id="8" name="">
             <a:extLst xmlns:a="http://schemas.openxmlformats.org/drawingml/2006/main">
               <a:ext uri="{FF2B5EF4-FFF2-40B4-BE49-F238E27FC236}">
-                <a16:creationId xmlns:a16="http://schemas.microsoft.com/office/drawing/2014/main" id="{D26CED27-F5A5-443A-881F-F89A17FA37BC}"/>
+                <a16:creationId xmlns:a16="http://schemas.microsoft.com/office/drawing/2014/main" id="{BE63F3D7-B47A-4D11-A10B-7A26DFCE59F5}"/>
               </a:ext>
             </a:extLst>
           </p:cNvPr>
@@ -8313,7 +8313,7 @@
           <p:cNvPr id="9" name="">
             <a:extLst xmlns:a="http://schemas.openxmlformats.org/drawingml/2006/main">
               <a:ext uri="{FF2B5EF4-FFF2-40B4-BE49-F238E27FC236}">
-                <a16:creationId xmlns:a16="http://schemas.microsoft.com/office/drawing/2014/main" id="{E5CD0B47-9656-412E-8DBE-60EB861CBC5A}"/>
+                <a16:creationId xmlns:a16="http://schemas.microsoft.com/office/drawing/2014/main" id="{46A32C91-9D66-4049-AB41-6DA93A991EFF}"/>
               </a:ext>
             </a:extLst>
           </p:cNvPr>
@@ -8371,7 +8371,7 @@
           <p:cNvPr id="10" name="">
             <a:extLst xmlns:a="http://schemas.openxmlformats.org/drawingml/2006/main">
               <a:ext uri="{FF2B5EF4-FFF2-40B4-BE49-F238E27FC236}">
-                <a16:creationId xmlns:a16="http://schemas.microsoft.com/office/drawing/2014/main" id="{0BD2C29F-CACD-44B1-9914-76F0AE76B68B}"/>
+                <a16:creationId xmlns:a16="http://schemas.microsoft.com/office/drawing/2014/main" id="{6AB1F88A-F26F-4BC5-8D12-C22DF3EB9250}"/>
               </a:ext>
             </a:extLst>
           </p:cNvPr>
@@ -8427,7 +8427,7 @@
     </p:spTree>
     <p:extLst>
       <p:ext uri="{BB962C8B-B14F-4D97-AF65-F5344CB8AC3E}">
-        <p14:creationId xmlns:p14="http://schemas.microsoft.com/office/powerpoint/2010/main" val="1262004415"/>
+        <p14:creationId xmlns:p14="http://schemas.microsoft.com/office/powerpoint/2010/main" val="1623336636"/>
       </p:ext>
     </p:extLst>
   </p:cSld>
@@ -8458,7 +8458,7 @@
           <p:cNvPr id="1" name="">
             <a:extLst xmlns:a="http://schemas.openxmlformats.org/drawingml/2006/main">
               <a:ext uri="{FF2B5EF4-FFF2-40B4-BE49-F238E27FC236}">
-                <a16:creationId xmlns:a16="http://schemas.microsoft.com/office/drawing/2014/main" id="{EF4ECEE8-95E1-4D4E-A922-C1AEF3297009}"/>
+                <a16:creationId xmlns:a16="http://schemas.microsoft.com/office/drawing/2014/main" id="{53AD64AF-E0B2-4B61-A66F-6349826244E4}"/>
               </a:ext>
             </a:extLst>
           </p:cNvPr>
@@ -8497,7 +8497,7 @@
           <p:nvPr/>
         </p:nvPicPr>
         <p:blipFill>
-          <a:blip xmlns:r="http://schemas.openxmlformats.org/officeDocument/2006/relationships" xmlns:a="http://schemas.openxmlformats.org/drawingml/2006/main" r:embed="R4ff7b569784b4a87"/>
+          <a:blip xmlns:r="http://schemas.openxmlformats.org/officeDocument/2006/relationships" xmlns:a="http://schemas.openxmlformats.org/drawingml/2006/main" r:embed="R3c9a1011ab1c4acd"/>
           <a:stretch xmlns:a="http://schemas.openxmlformats.org/drawingml/2006/main"/>
         </p:blipFill>
         <p:spPr>
@@ -8515,7 +8515,7 @@
           <p:cNvPr id="3" name="">
             <a:extLst xmlns:a="http://schemas.openxmlformats.org/drawingml/2006/main">
               <a:ext uri="{FF2B5EF4-FFF2-40B4-BE49-F238E27FC236}">
-                <a16:creationId xmlns:a16="http://schemas.microsoft.com/office/drawing/2014/main" id="{DD332FDD-7D77-488D-AF89-6CFDCF801194}"/>
+                <a16:creationId xmlns:a16="http://schemas.microsoft.com/office/drawing/2014/main" id="{A24DEC3F-40BD-4C09-9C30-A8805C10D0A2}"/>
               </a:ext>
             </a:extLst>
           </p:cNvPr>
@@ -8553,14 +8553,14 @@
             <a:pPr algn="r">
               <a:defRPr sz="825" b="1">
                 <a:solidFill>
-                  <a:srgbClr val="0E1B3E"/>
+                  <a:srgbClr val="070F26"/>
                 </a:solidFill>
               </a:defRPr>
             </a:pPr>
             <a:r>
               <a:rPr sz="825" b="1">
                 <a:solidFill>
-                  <a:srgbClr val="0E1B3E"/>
+                  <a:srgbClr val="070F26"/>
                 </a:solidFill>
               </a:rPr>
               <a:t>NTT DATA UNIVERSITY</a:t>
@@ -8573,7 +8573,7 @@
           <p:cNvPr id="4" name="">
             <a:extLst xmlns:a="http://schemas.openxmlformats.org/drawingml/2006/main">
               <a:ext uri="{FF2B5EF4-FFF2-40B4-BE49-F238E27FC236}">
-                <a16:creationId xmlns:a16="http://schemas.microsoft.com/office/drawing/2014/main" id="{CE69922B-CFDD-4C92-95A3-92E619632F5A}"/>
+                <a16:creationId xmlns:a16="http://schemas.microsoft.com/office/drawing/2014/main" id="{9BD9CB89-B0B1-4D02-A35B-B75BE40648CB}"/>
               </a:ext>
             </a:extLst>
           </p:cNvPr>
@@ -8631,7 +8631,7 @@
           <p:cNvPr id="5" name="">
             <a:extLst xmlns:a="http://schemas.openxmlformats.org/drawingml/2006/main">
               <a:ext uri="{FF2B5EF4-FFF2-40B4-BE49-F238E27FC236}">
-                <a16:creationId xmlns:a16="http://schemas.microsoft.com/office/drawing/2014/main" id="{0D2498B9-DFD5-4421-892A-6A42A8089F0D}"/>
+                <a16:creationId xmlns:a16="http://schemas.microsoft.com/office/drawing/2014/main" id="{E8F09588-501A-446C-8FB9-A244E037996A}"/>
               </a:ext>
             </a:extLst>
           </p:cNvPr>
@@ -8689,7 +8689,7 @@
           <p:cNvPr id="6" name="">
             <a:extLst xmlns:a="http://schemas.openxmlformats.org/drawingml/2006/main">
               <a:ext uri="{FF2B5EF4-FFF2-40B4-BE49-F238E27FC236}">
-                <a16:creationId xmlns:a16="http://schemas.microsoft.com/office/drawing/2014/main" id="{DC805917-D50A-4483-A91F-2898DD9A7581}"/>
+                <a16:creationId xmlns:a16="http://schemas.microsoft.com/office/drawing/2014/main" id="{5E2F0D09-C062-4FDB-A1C1-5C41C380CFE2}"/>
               </a:ext>
             </a:extLst>
           </p:cNvPr>
@@ -8727,14 +8727,14 @@
             <a:pPr algn="r">
               <a:defRPr sz="675" b="1">
                 <a:solidFill>
-                  <a:srgbClr val="0E1B3E"/>
+                  <a:srgbClr val="070F26"/>
                 </a:solidFill>
               </a:defRPr>
             </a:pPr>
             <a:r>
               <a:rPr sz="675" b="1">
                 <a:solidFill>
-                  <a:srgbClr val="0E1B3E"/>
+                  <a:srgbClr val="070F26"/>
                 </a:solidFill>
               </a:rPr>
               <a:t>NTT DATA UNIVERSITY</a:t>
@@ -8747,7 +8747,7 @@
           <p:cNvPr id="7" name="">
             <a:extLst xmlns:a="http://schemas.openxmlformats.org/drawingml/2006/main">
               <a:ext uri="{FF2B5EF4-FFF2-40B4-BE49-F238E27FC236}">
-                <a16:creationId xmlns:a16="http://schemas.microsoft.com/office/drawing/2014/main" id="{69A7A8E6-AC8A-4268-8542-4A035A626301}"/>
+                <a16:creationId xmlns:a16="http://schemas.microsoft.com/office/drawing/2014/main" id="{F199DA3A-D104-4971-B4F7-23560FA97729}"/>
               </a:ext>
             </a:extLst>
           </p:cNvPr>
@@ -8805,7 +8805,7 @@
           <p:cNvPr id="8" name="">
             <a:extLst xmlns:a="http://schemas.openxmlformats.org/drawingml/2006/main">
               <a:ext uri="{FF2B5EF4-FFF2-40B4-BE49-F238E27FC236}">
-                <a16:creationId xmlns:a16="http://schemas.microsoft.com/office/drawing/2014/main" id="{EC40BC68-4455-4AE0-930A-504D04143D27}"/>
+                <a16:creationId xmlns:a16="http://schemas.microsoft.com/office/drawing/2014/main" id="{12657AFB-06F0-4FA4-BF8A-15929BF22D66}"/>
               </a:ext>
             </a:extLst>
           </p:cNvPr>
@@ -8843,14 +8843,14 @@
             <a:pPr algn="l">
               <a:defRPr sz="2400" b="0">
                 <a:solidFill>
-                  <a:srgbClr val="0E1B3E"/>
+                  <a:srgbClr val="070F26"/>
                 </a:solidFill>
               </a:defRPr>
             </a:pPr>
             <a:r>
               <a:rPr sz="2400" b="0">
                 <a:solidFill>
-                  <a:srgbClr val="0E1B3E"/>
+                  <a:srgbClr val="070F26"/>
                 </a:solidFill>
               </a:rPr>
               <a:t>Cinco elementos da UI do Airflow</a:t>
@@ -8863,7 +8863,7 @@
           <p:cNvPr id="9" name="">
             <a:extLst xmlns:a="http://schemas.openxmlformats.org/drawingml/2006/main">
               <a:ext uri="{FF2B5EF4-FFF2-40B4-BE49-F238E27FC236}">
-                <a16:creationId xmlns:a16="http://schemas.microsoft.com/office/drawing/2014/main" id="{1116E042-969A-44E1-AB48-2DACED510D74}"/>
+                <a16:creationId xmlns:a16="http://schemas.microsoft.com/office/drawing/2014/main" id="{2C681CFD-1E64-437B-B6FE-DEAF6A9FEC40}"/>
               </a:ext>
             </a:extLst>
           </p:cNvPr>
@@ -8921,7 +8921,7 @@
           <p:cNvPr id="10" name="">
             <a:extLst xmlns:a="http://schemas.openxmlformats.org/drawingml/2006/main">
               <a:ext uri="{FF2B5EF4-FFF2-40B4-BE49-F238E27FC236}">
-                <a16:creationId xmlns:a16="http://schemas.microsoft.com/office/drawing/2014/main" id="{24354577-262B-4CFB-9DE0-4CFFDD63B8AE}"/>
+                <a16:creationId xmlns:a16="http://schemas.microsoft.com/office/drawing/2014/main" id="{807E47E2-6915-4D29-A50F-1DB5BB31593F}"/>
               </a:ext>
             </a:extLst>
           </p:cNvPr>
@@ -8954,7 +8954,7 @@
           <p:cNvPr id="11" name="">
             <a:extLst xmlns:a="http://schemas.openxmlformats.org/drawingml/2006/main">
               <a:ext uri="{FF2B5EF4-FFF2-40B4-BE49-F238E27FC236}">
-                <a16:creationId xmlns:a16="http://schemas.microsoft.com/office/drawing/2014/main" id="{03C68931-67EF-4FE1-8FBB-EA862A481F44}"/>
+                <a16:creationId xmlns:a16="http://schemas.microsoft.com/office/drawing/2014/main" id="{0C49C1E9-5F86-487E-8615-C6A6A73105EE}"/>
               </a:ext>
             </a:extLst>
           </p:cNvPr>
@@ -8989,7 +8989,7 @@
           <p:cNvPr id="12" name="">
             <a:extLst xmlns:a="http://schemas.openxmlformats.org/drawingml/2006/main">
               <a:ext uri="{FF2B5EF4-FFF2-40B4-BE49-F238E27FC236}">
-                <a16:creationId xmlns:a16="http://schemas.microsoft.com/office/drawing/2014/main" id="{601FA150-D6E6-46D3-9E75-72965F5321A7}"/>
+                <a16:creationId xmlns:a16="http://schemas.microsoft.com/office/drawing/2014/main" id="{D3C5A1D4-FDF0-48BB-9B83-C97DFF809E0A}"/>
               </a:ext>
             </a:extLst>
           </p:cNvPr>
@@ -9047,7 +9047,7 @@
           <p:cNvPr id="13" name="">
             <a:extLst xmlns:a="http://schemas.openxmlformats.org/drawingml/2006/main">
               <a:ext uri="{FF2B5EF4-FFF2-40B4-BE49-F238E27FC236}">
-                <a16:creationId xmlns:a16="http://schemas.microsoft.com/office/drawing/2014/main" id="{5A77A4BF-B72C-4021-8676-4DBE6FD97D81}"/>
+                <a16:creationId xmlns:a16="http://schemas.microsoft.com/office/drawing/2014/main" id="{0B004343-4943-4A0B-89FD-90B68F749DB6}"/>
               </a:ext>
             </a:extLst>
           </p:cNvPr>
@@ -9139,7 +9139,7 @@
           <p:cNvPr id="14" name="">
             <a:extLst xmlns:a="http://schemas.openxmlformats.org/drawingml/2006/main">
               <a:ext uri="{FF2B5EF4-FFF2-40B4-BE49-F238E27FC236}">
-                <a16:creationId xmlns:a16="http://schemas.microsoft.com/office/drawing/2014/main" id="{EC08AD84-C82F-4D4A-9D59-9492CCEA8E13}"/>
+                <a16:creationId xmlns:a16="http://schemas.microsoft.com/office/drawing/2014/main" id="{F28EE583-FB33-4033-A456-3748DB6A119E}"/>
               </a:ext>
             </a:extLst>
           </p:cNvPr>
@@ -9172,7 +9172,7 @@
           <p:cNvPr id="15" name="">
             <a:extLst xmlns:a="http://schemas.openxmlformats.org/drawingml/2006/main">
               <a:ext uri="{FF2B5EF4-FFF2-40B4-BE49-F238E27FC236}">
-                <a16:creationId xmlns:a16="http://schemas.microsoft.com/office/drawing/2014/main" id="{E6D937D0-A31E-42D3-AB66-C4E9AAAB3F93}"/>
+                <a16:creationId xmlns:a16="http://schemas.microsoft.com/office/drawing/2014/main" id="{C44030CB-88D6-4C92-8E32-262D89FC8D2F}"/>
               </a:ext>
             </a:extLst>
           </p:cNvPr>
@@ -9207,7 +9207,7 @@
           <p:cNvPr id="16" name="">
             <a:extLst xmlns:a="http://schemas.openxmlformats.org/drawingml/2006/main">
               <a:ext uri="{FF2B5EF4-FFF2-40B4-BE49-F238E27FC236}">
-                <a16:creationId xmlns:a16="http://schemas.microsoft.com/office/drawing/2014/main" id="{B50ABEE4-9BA3-48C8-99B4-6E7A84CBE5D5}"/>
+                <a16:creationId xmlns:a16="http://schemas.microsoft.com/office/drawing/2014/main" id="{BCA7BEA3-FA18-4233-AFA2-7EBB87516E46}"/>
               </a:ext>
             </a:extLst>
           </p:cNvPr>
@@ -9265,7 +9265,7 @@
           <p:cNvPr id="17" name="">
             <a:extLst xmlns:a="http://schemas.openxmlformats.org/drawingml/2006/main">
               <a:ext uri="{FF2B5EF4-FFF2-40B4-BE49-F238E27FC236}">
-                <a16:creationId xmlns:a16="http://schemas.microsoft.com/office/drawing/2014/main" id="{D21CE9F3-5CBD-4088-9A0C-B1D9A35805D2}"/>
+                <a16:creationId xmlns:a16="http://schemas.microsoft.com/office/drawing/2014/main" id="{8C6CB229-AD83-4835-89AE-7DA4DB8ABCC0}"/>
               </a:ext>
             </a:extLst>
           </p:cNvPr>
@@ -9357,7 +9357,7 @@
           <p:cNvPr id="18" name="">
             <a:extLst xmlns:a="http://schemas.openxmlformats.org/drawingml/2006/main">
               <a:ext uri="{FF2B5EF4-FFF2-40B4-BE49-F238E27FC236}">
-                <a16:creationId xmlns:a16="http://schemas.microsoft.com/office/drawing/2014/main" id="{D6CB36A3-B421-4DD3-B844-7F444856F56B}"/>
+                <a16:creationId xmlns:a16="http://schemas.microsoft.com/office/drawing/2014/main" id="{2FEE5DF8-83E3-4047-A396-29D3BC995B8E}"/>
               </a:ext>
             </a:extLst>
           </p:cNvPr>
@@ -9390,7 +9390,7 @@
           <p:cNvPr id="19" name="">
             <a:extLst xmlns:a="http://schemas.openxmlformats.org/drawingml/2006/main">
               <a:ext uri="{FF2B5EF4-FFF2-40B4-BE49-F238E27FC236}">
-                <a16:creationId xmlns:a16="http://schemas.microsoft.com/office/drawing/2014/main" id="{73B38C27-5A4F-4F2F-A482-535760A5260B}"/>
+                <a16:creationId xmlns:a16="http://schemas.microsoft.com/office/drawing/2014/main" id="{D57218A1-18C9-4F04-BAC5-576246369846}"/>
               </a:ext>
             </a:extLst>
           </p:cNvPr>
@@ -9425,7 +9425,7 @@
           <p:cNvPr id="20" name="">
             <a:extLst xmlns:a="http://schemas.openxmlformats.org/drawingml/2006/main">
               <a:ext uri="{FF2B5EF4-FFF2-40B4-BE49-F238E27FC236}">
-                <a16:creationId xmlns:a16="http://schemas.microsoft.com/office/drawing/2014/main" id="{F3B7F898-4AB6-4246-A9BD-797D2A23E6CC}"/>
+                <a16:creationId xmlns:a16="http://schemas.microsoft.com/office/drawing/2014/main" id="{F9F12FB5-36BB-435C-BC23-554C96918F03}"/>
               </a:ext>
             </a:extLst>
           </p:cNvPr>
@@ -9483,7 +9483,7 @@
           <p:cNvPr id="21" name="">
             <a:extLst xmlns:a="http://schemas.openxmlformats.org/drawingml/2006/main">
               <a:ext uri="{FF2B5EF4-FFF2-40B4-BE49-F238E27FC236}">
-                <a16:creationId xmlns:a16="http://schemas.microsoft.com/office/drawing/2014/main" id="{40B9D754-FBFF-45D7-89D4-FF97B8C7F04A}"/>
+                <a16:creationId xmlns:a16="http://schemas.microsoft.com/office/drawing/2014/main" id="{DADB89BD-8DAC-43A2-BF57-06300E93B130}"/>
               </a:ext>
             </a:extLst>
           </p:cNvPr>
@@ -9573,7 +9573,7 @@
     </p:spTree>
     <p:extLst>
       <p:ext uri="{BB962C8B-B14F-4D97-AF65-F5344CB8AC3E}">
-        <p14:creationId xmlns:p14="http://schemas.microsoft.com/office/powerpoint/2010/main" val="1914399179"/>
+        <p14:creationId xmlns:p14="http://schemas.microsoft.com/office/powerpoint/2010/main" val="1056709572"/>
       </p:ext>
     </p:extLst>
   </p:cSld>
@@ -9586,7 +9586,7 @@
     <p:bg>
       <p:bgPr>
         <a:solidFill xmlns:a="http://schemas.openxmlformats.org/drawingml/2006/main">
-          <a:srgbClr val="0E1B3E"/>
+          <a:srgbClr val="070F26"/>
         </a:solidFill>
       </p:bgPr>
     </p:bg>
@@ -9604,7 +9604,7 @@
           <p:cNvPr id="1" name="">
             <a:extLst xmlns:a="http://schemas.openxmlformats.org/drawingml/2006/main">
               <a:ext uri="{FF2B5EF4-FFF2-40B4-BE49-F238E27FC236}">
-                <a16:creationId xmlns:a16="http://schemas.microsoft.com/office/drawing/2014/main" id="{0992A2A6-28BB-49B9-AAE5-082FF9074F81}"/>
+                <a16:creationId xmlns:a16="http://schemas.microsoft.com/office/drawing/2014/main" id="{2DF30A4E-959D-458F-B267-A369B13E55CE}"/>
               </a:ext>
             </a:extLst>
           </p:cNvPr>
@@ -9622,7 +9622,7 @@
             <a:avLst/>
           </a:prstGeom>
           <a:solidFill xmlns:a="http://schemas.openxmlformats.org/drawingml/2006/main">
-            <a:srgbClr val="0E1B3E"/>
+            <a:srgbClr val="070F26"/>
           </a:solidFill>
           <a:ln xmlns:a="http://schemas.openxmlformats.org/drawingml/2006/main" w="0">
             <a:solidFill>
@@ -9643,7 +9643,7 @@
           <p:nvPr/>
         </p:nvPicPr>
         <p:blipFill>
-          <a:blip xmlns:r="http://schemas.openxmlformats.org/officeDocument/2006/relationships" xmlns:a="http://schemas.openxmlformats.org/drawingml/2006/main" r:embed="R47f45a31b80f440e"/>
+          <a:blip xmlns:r="http://schemas.openxmlformats.org/officeDocument/2006/relationships" xmlns:a="http://schemas.openxmlformats.org/drawingml/2006/main" r:embed="R8dddd412d4ee4576"/>
           <a:stretch xmlns:a="http://schemas.openxmlformats.org/drawingml/2006/main"/>
         </p:blipFill>
         <p:spPr>
@@ -9661,7 +9661,7 @@
           <p:cNvPr id="3" name="">
             <a:extLst xmlns:a="http://schemas.openxmlformats.org/drawingml/2006/main">
               <a:ext uri="{FF2B5EF4-FFF2-40B4-BE49-F238E27FC236}">
-                <a16:creationId xmlns:a16="http://schemas.microsoft.com/office/drawing/2014/main" id="{6257BE0B-3C84-4150-A9B0-CB161E4E1963}"/>
+                <a16:creationId xmlns:a16="http://schemas.microsoft.com/office/drawing/2014/main" id="{4145D06F-85A1-4751-AEFF-2146AE4247A7}"/>
               </a:ext>
             </a:extLst>
           </p:cNvPr>
@@ -9719,7 +9719,7 @@
           <p:cNvPr id="4" name="">
             <a:extLst xmlns:a="http://schemas.openxmlformats.org/drawingml/2006/main">
               <a:ext uri="{FF2B5EF4-FFF2-40B4-BE49-F238E27FC236}">
-                <a16:creationId xmlns:a16="http://schemas.microsoft.com/office/drawing/2014/main" id="{E6E44668-8C52-4BD1-95FF-7E8029A40C34}"/>
+                <a16:creationId xmlns:a16="http://schemas.microsoft.com/office/drawing/2014/main" id="{02C83BFA-7C76-4A53-9C22-4D0F2E042EE7}"/>
               </a:ext>
             </a:extLst>
           </p:cNvPr>
@@ -9777,7 +9777,7 @@
           <p:cNvPr id="5" name="">
             <a:extLst xmlns:a="http://schemas.openxmlformats.org/drawingml/2006/main">
               <a:ext uri="{FF2B5EF4-FFF2-40B4-BE49-F238E27FC236}">
-                <a16:creationId xmlns:a16="http://schemas.microsoft.com/office/drawing/2014/main" id="{5B013ACC-FDC0-4820-AF1E-390D6FF7AA94}"/>
+                <a16:creationId xmlns:a16="http://schemas.microsoft.com/office/drawing/2014/main" id="{F6DA4CF8-628B-4E4E-81C8-FFF3F4F665E5}"/>
               </a:ext>
             </a:extLst>
           </p:cNvPr>
@@ -9835,7 +9835,7 @@
           <p:cNvPr id="6" name="">
             <a:extLst xmlns:a="http://schemas.openxmlformats.org/drawingml/2006/main">
               <a:ext uri="{FF2B5EF4-FFF2-40B4-BE49-F238E27FC236}">
-                <a16:creationId xmlns:a16="http://schemas.microsoft.com/office/drawing/2014/main" id="{0BF1E227-6774-4D0E-A021-2835E3375155}"/>
+                <a16:creationId xmlns:a16="http://schemas.microsoft.com/office/drawing/2014/main" id="{CACDC5DF-FB98-437E-BD03-CCD5DB849135}"/>
               </a:ext>
             </a:extLst>
           </p:cNvPr>
@@ -9897,13 +9897,13 @@
           <p:nvPr/>
         </p:nvPicPr>
         <p:blipFill>
-          <a:blip xmlns:r="http://schemas.openxmlformats.org/officeDocument/2006/relationships" xmlns:a="http://schemas.openxmlformats.org/drawingml/2006/main" r:embed="R9c01acc5d6b24587"/>
+          <a:blip xmlns:r="http://schemas.openxmlformats.org/officeDocument/2006/relationships" xmlns:a="http://schemas.openxmlformats.org/drawingml/2006/main" r:embed="R38867e598b2e40a6"/>
           <a:stretch xmlns:a="http://schemas.openxmlformats.org/drawingml/2006/main"/>
         </p:blipFill>
         <p:spPr>
           <a:xfrm xmlns:a="http://schemas.openxmlformats.org/drawingml/2006/main">
-            <a:off x="476250" y="1257300"/>
-            <a:ext cx="2667000" cy="4533900"/>
+            <a:off x="0" y="1746250"/>
+            <a:ext cx="2667000" cy="3556000"/>
           </a:xfrm>
           <a:prstGeom xmlns:a="http://schemas.openxmlformats.org/drawingml/2006/main" prst="rect">
             <a:avLst/>
@@ -9915,7 +9915,7 @@
           <p:cNvPr id="8" name="">
             <a:extLst xmlns:a="http://schemas.openxmlformats.org/drawingml/2006/main">
               <a:ext uri="{FF2B5EF4-FFF2-40B4-BE49-F238E27FC236}">
-                <a16:creationId xmlns:a16="http://schemas.microsoft.com/office/drawing/2014/main" id="{7AD32E04-8742-4E7C-B1FA-AFEEF6A190D8}"/>
+                <a16:creationId xmlns:a16="http://schemas.microsoft.com/office/drawing/2014/main" id="{A4F6DAA2-97FC-4803-A69D-09C83192B3F0}"/>
               </a:ext>
             </a:extLst>
           </p:cNvPr>
@@ -9973,7 +9973,7 @@
           <p:cNvPr id="9" name="">
             <a:extLst xmlns:a="http://schemas.openxmlformats.org/drawingml/2006/main">
               <a:ext uri="{FF2B5EF4-FFF2-40B4-BE49-F238E27FC236}">
-                <a16:creationId xmlns:a16="http://schemas.microsoft.com/office/drawing/2014/main" id="{FFE4BFC3-88D2-471A-9273-E874C95039EC}"/>
+                <a16:creationId xmlns:a16="http://schemas.microsoft.com/office/drawing/2014/main" id="{5D1BC0A7-446A-490C-8315-A368898594BF}"/>
               </a:ext>
             </a:extLst>
           </p:cNvPr>
@@ -10031,7 +10031,7 @@
           <p:cNvPr id="10" name="">
             <a:extLst xmlns:a="http://schemas.openxmlformats.org/drawingml/2006/main">
               <a:ext uri="{FF2B5EF4-FFF2-40B4-BE49-F238E27FC236}">
-                <a16:creationId xmlns:a16="http://schemas.microsoft.com/office/drawing/2014/main" id="{DF69CE9B-82F6-4593-9F9A-A70E98BE9D8F}"/>
+                <a16:creationId xmlns:a16="http://schemas.microsoft.com/office/drawing/2014/main" id="{6120B729-85D4-4C53-BC5B-986B66364BF7}"/>
               </a:ext>
             </a:extLst>
           </p:cNvPr>
@@ -10087,7 +10087,7 @@
     </p:spTree>
     <p:extLst>
       <p:ext uri="{BB962C8B-B14F-4D97-AF65-F5344CB8AC3E}">
-        <p14:creationId xmlns:p14="http://schemas.microsoft.com/office/powerpoint/2010/main" val="1340332012"/>
+        <p14:creationId xmlns:p14="http://schemas.microsoft.com/office/powerpoint/2010/main" val="1264194602"/>
       </p:ext>
     </p:extLst>
   </p:cSld>
@@ -10118,7 +10118,7 @@
           <p:cNvPr id="1" name="">
             <a:extLst xmlns:a="http://schemas.openxmlformats.org/drawingml/2006/main">
               <a:ext uri="{FF2B5EF4-FFF2-40B4-BE49-F238E27FC236}">
-                <a16:creationId xmlns:a16="http://schemas.microsoft.com/office/drawing/2014/main" id="{43F62D90-F8A4-47A6-8B9F-678F0C61C490}"/>
+                <a16:creationId xmlns:a16="http://schemas.microsoft.com/office/drawing/2014/main" id="{5F52B6D8-AA5D-4E0F-8E08-8D4744D1B3AF}"/>
               </a:ext>
             </a:extLst>
           </p:cNvPr>
@@ -10157,7 +10157,7 @@
           <p:nvPr/>
         </p:nvPicPr>
         <p:blipFill>
-          <a:blip xmlns:r="http://schemas.openxmlformats.org/officeDocument/2006/relationships" xmlns:a="http://schemas.openxmlformats.org/drawingml/2006/main" r:embed="Re4388c56f6a447fd"/>
+          <a:blip xmlns:r="http://schemas.openxmlformats.org/officeDocument/2006/relationships" xmlns:a="http://schemas.openxmlformats.org/drawingml/2006/main" r:embed="R0dd4822c1e07431a"/>
           <a:stretch xmlns:a="http://schemas.openxmlformats.org/drawingml/2006/main"/>
         </p:blipFill>
         <p:spPr>
@@ -10175,7 +10175,7 @@
           <p:cNvPr id="3" name="">
             <a:extLst xmlns:a="http://schemas.openxmlformats.org/drawingml/2006/main">
               <a:ext uri="{FF2B5EF4-FFF2-40B4-BE49-F238E27FC236}">
-                <a16:creationId xmlns:a16="http://schemas.microsoft.com/office/drawing/2014/main" id="{9F97B5CC-4E7B-486A-A70B-71F2BC0BA350}"/>
+                <a16:creationId xmlns:a16="http://schemas.microsoft.com/office/drawing/2014/main" id="{B2F0669A-6138-45D5-B66E-BA2467839BB9}"/>
               </a:ext>
             </a:extLst>
           </p:cNvPr>
@@ -10213,14 +10213,14 @@
             <a:pPr algn="r">
               <a:defRPr sz="825" b="1">
                 <a:solidFill>
-                  <a:srgbClr val="0E1B3E"/>
+                  <a:srgbClr val="070F26"/>
                 </a:solidFill>
               </a:defRPr>
             </a:pPr>
             <a:r>
               <a:rPr sz="825" b="1">
                 <a:solidFill>
-                  <a:srgbClr val="0E1B3E"/>
+                  <a:srgbClr val="070F26"/>
                 </a:solidFill>
               </a:rPr>
               <a:t>NTT DATA UNIVERSITY</a:t>
@@ -10233,7 +10233,7 @@
           <p:cNvPr id="4" name="">
             <a:extLst xmlns:a="http://schemas.openxmlformats.org/drawingml/2006/main">
               <a:ext uri="{FF2B5EF4-FFF2-40B4-BE49-F238E27FC236}">
-                <a16:creationId xmlns:a16="http://schemas.microsoft.com/office/drawing/2014/main" id="{CA8E7632-8A22-4922-8514-9534AC222004}"/>
+                <a16:creationId xmlns:a16="http://schemas.microsoft.com/office/drawing/2014/main" id="{65A600A8-788F-45E8-A33C-4B1DB0302160}"/>
               </a:ext>
             </a:extLst>
           </p:cNvPr>
@@ -10291,7 +10291,7 @@
           <p:cNvPr id="5" name="">
             <a:extLst xmlns:a="http://schemas.openxmlformats.org/drawingml/2006/main">
               <a:ext uri="{FF2B5EF4-FFF2-40B4-BE49-F238E27FC236}">
-                <a16:creationId xmlns:a16="http://schemas.microsoft.com/office/drawing/2014/main" id="{B0554BFC-207E-4A25-A630-BD6341E1E0F8}"/>
+                <a16:creationId xmlns:a16="http://schemas.microsoft.com/office/drawing/2014/main" id="{DA9E13F2-755B-466E-9D9A-DB2B269C16FB}"/>
               </a:ext>
             </a:extLst>
           </p:cNvPr>
@@ -10349,7 +10349,7 @@
           <p:cNvPr id="6" name="">
             <a:extLst xmlns:a="http://schemas.openxmlformats.org/drawingml/2006/main">
               <a:ext uri="{FF2B5EF4-FFF2-40B4-BE49-F238E27FC236}">
-                <a16:creationId xmlns:a16="http://schemas.microsoft.com/office/drawing/2014/main" id="{4F6FC1F5-B48B-4171-B826-8357E2D6B22B}"/>
+                <a16:creationId xmlns:a16="http://schemas.microsoft.com/office/drawing/2014/main" id="{03C4692B-3895-4951-B732-E1D3871A15DB}"/>
               </a:ext>
             </a:extLst>
           </p:cNvPr>
@@ -10387,14 +10387,14 @@
             <a:pPr algn="r">
               <a:defRPr sz="675" b="1">
                 <a:solidFill>
-                  <a:srgbClr val="0E1B3E"/>
+                  <a:srgbClr val="070F26"/>
                 </a:solidFill>
               </a:defRPr>
             </a:pPr>
             <a:r>
               <a:rPr sz="675" b="1">
                 <a:solidFill>
-                  <a:srgbClr val="0E1B3E"/>
+                  <a:srgbClr val="070F26"/>
                 </a:solidFill>
               </a:rPr>
               <a:t>NTT DATA UNIVERSITY</a:t>
@@ -10407,7 +10407,7 @@
           <p:cNvPr id="7" name="">
             <a:extLst xmlns:a="http://schemas.openxmlformats.org/drawingml/2006/main">
               <a:ext uri="{FF2B5EF4-FFF2-40B4-BE49-F238E27FC236}">
-                <a16:creationId xmlns:a16="http://schemas.microsoft.com/office/drawing/2014/main" id="{8C586119-C272-4BFE-B21A-C57607003D32}"/>
+                <a16:creationId xmlns:a16="http://schemas.microsoft.com/office/drawing/2014/main" id="{80393DC5-DC90-4DD7-917D-3852B41A26EF}"/>
               </a:ext>
             </a:extLst>
           </p:cNvPr>
@@ -10465,7 +10465,7 @@
           <p:cNvPr id="8" name="">
             <a:extLst xmlns:a="http://schemas.openxmlformats.org/drawingml/2006/main">
               <a:ext uri="{FF2B5EF4-FFF2-40B4-BE49-F238E27FC236}">
-                <a16:creationId xmlns:a16="http://schemas.microsoft.com/office/drawing/2014/main" id="{52702326-7AA2-460D-AA99-15FF4D74CE0C}"/>
+                <a16:creationId xmlns:a16="http://schemas.microsoft.com/office/drawing/2014/main" id="{8F5BEC1E-47F0-4E59-A7E5-0820A7D7BBB0}"/>
               </a:ext>
             </a:extLst>
           </p:cNvPr>
@@ -10503,14 +10503,14 @@
             <a:pPr algn="l">
               <a:defRPr sz="2400" b="0">
                 <a:solidFill>
-                  <a:srgbClr val="0E1B3E"/>
+                  <a:srgbClr val="070F26"/>
                 </a:solidFill>
               </a:defRPr>
             </a:pPr>
             <a:r>
               <a:rPr sz="2400" b="0">
                 <a:solidFill>
-                  <a:srgbClr val="0E1B3E"/>
+                  <a:srgbClr val="070F26"/>
                 </a:solidFill>
               </a:rPr>
               <a:t>Três fases — do papel ao Git</a:t>
@@ -10523,7 +10523,7 @@
           <p:cNvPr id="9" name="">
             <a:extLst xmlns:a="http://schemas.openxmlformats.org/drawingml/2006/main">
               <a:ext uri="{FF2B5EF4-FFF2-40B4-BE49-F238E27FC236}">
-                <a16:creationId xmlns:a16="http://schemas.microsoft.com/office/drawing/2014/main" id="{245FA472-522F-49B4-8191-F4067C54DF97}"/>
+                <a16:creationId xmlns:a16="http://schemas.microsoft.com/office/drawing/2014/main" id="{8E1D95CD-8AB2-43AD-AFC3-9B936BD8F09B}"/>
               </a:ext>
             </a:extLst>
           </p:cNvPr>
@@ -10581,7 +10581,7 @@
           <p:cNvPr id="10" name="">
             <a:extLst xmlns:a="http://schemas.openxmlformats.org/drawingml/2006/main">
               <a:ext uri="{FF2B5EF4-FFF2-40B4-BE49-F238E27FC236}">
-                <a16:creationId xmlns:a16="http://schemas.microsoft.com/office/drawing/2014/main" id="{79352A7C-7EEA-4B11-AA47-A7B3A3D19850}"/>
+                <a16:creationId xmlns:a16="http://schemas.microsoft.com/office/drawing/2014/main" id="{E1F5D31E-E1EE-4DF7-898F-4884291B0328}"/>
               </a:ext>
             </a:extLst>
           </p:cNvPr>
@@ -10614,7 +10614,7 @@
           <p:cNvPr id="11" name="">
             <a:extLst xmlns:a="http://schemas.openxmlformats.org/drawingml/2006/main">
               <a:ext uri="{FF2B5EF4-FFF2-40B4-BE49-F238E27FC236}">
-                <a16:creationId xmlns:a16="http://schemas.microsoft.com/office/drawing/2014/main" id="{D4CFD878-25AC-44E4-BDD5-C301AEB8849B}"/>
+                <a16:creationId xmlns:a16="http://schemas.microsoft.com/office/drawing/2014/main" id="{52EF610D-25FA-44C7-9A3D-79B5D4986F39}"/>
               </a:ext>
             </a:extLst>
           </p:cNvPr>
@@ -10649,7 +10649,7 @@
           <p:cNvPr id="12" name="">
             <a:extLst xmlns:a="http://schemas.openxmlformats.org/drawingml/2006/main">
               <a:ext uri="{FF2B5EF4-FFF2-40B4-BE49-F238E27FC236}">
-                <a16:creationId xmlns:a16="http://schemas.microsoft.com/office/drawing/2014/main" id="{154FD214-4B17-472F-B1E2-CDBB56EACE94}"/>
+                <a16:creationId xmlns:a16="http://schemas.microsoft.com/office/drawing/2014/main" id="{68E8F21C-CF87-4B10-845A-0C5CD2C74B85}"/>
               </a:ext>
             </a:extLst>
           </p:cNvPr>
@@ -10707,7 +10707,7 @@
           <p:cNvPr id="13" name="">
             <a:extLst xmlns:a="http://schemas.openxmlformats.org/drawingml/2006/main">
               <a:ext uri="{FF2B5EF4-FFF2-40B4-BE49-F238E27FC236}">
-                <a16:creationId xmlns:a16="http://schemas.microsoft.com/office/drawing/2014/main" id="{22E72D69-D4AC-4BD9-8AAE-594ADDC6AEA5}"/>
+                <a16:creationId xmlns:a16="http://schemas.microsoft.com/office/drawing/2014/main" id="{0137C305-D2C2-440F-812F-49723AB22412}"/>
               </a:ext>
             </a:extLst>
           </p:cNvPr>
@@ -10745,14 +10745,14 @@
             <a:pPr algn="l">
               <a:defRPr sz="1050" b="1">
                 <a:solidFill>
-                  <a:srgbClr val="0E1B3E"/>
+                  <a:srgbClr val="070F26"/>
                 </a:solidFill>
               </a:defRPr>
             </a:pPr>
             <a:r>
               <a:rPr sz="1050" b="1">
                 <a:solidFill>
-                  <a:srgbClr val="0E1B3E"/>
+                  <a:srgbClr val="070F26"/>
                 </a:solidFill>
               </a:rPr>
               <a:t>Desenhar — 10 min</a:t>
@@ -10765,7 +10765,7 @@
           <p:cNvPr id="14" name="">
             <a:extLst xmlns:a="http://schemas.openxmlformats.org/drawingml/2006/main">
               <a:ext uri="{FF2B5EF4-FFF2-40B4-BE49-F238E27FC236}">
-                <a16:creationId xmlns:a16="http://schemas.microsoft.com/office/drawing/2014/main" id="{B94E2464-048C-4D8A-A7CB-BCA0D19E6CFB}"/>
+                <a16:creationId xmlns:a16="http://schemas.microsoft.com/office/drawing/2014/main" id="{AB331FB3-313F-494A-8FC2-A24FFF5C6FB9}"/>
               </a:ext>
             </a:extLst>
           </p:cNvPr>
@@ -10857,7 +10857,7 @@
           <p:cNvPr id="15" name="">
             <a:extLst xmlns:a="http://schemas.openxmlformats.org/drawingml/2006/main">
               <a:ext uri="{FF2B5EF4-FFF2-40B4-BE49-F238E27FC236}">
-                <a16:creationId xmlns:a16="http://schemas.microsoft.com/office/drawing/2014/main" id="{6F4AE9F8-09AE-44DC-919C-4FFE4A2529BF}"/>
+                <a16:creationId xmlns:a16="http://schemas.microsoft.com/office/drawing/2014/main" id="{2A03AA6D-0979-4AFE-8119-8F4D36206D35}"/>
               </a:ext>
             </a:extLst>
           </p:cNvPr>
@@ -10890,7 +10890,7 @@
           <p:cNvPr id="16" name="">
             <a:extLst xmlns:a="http://schemas.openxmlformats.org/drawingml/2006/main">
               <a:ext uri="{FF2B5EF4-FFF2-40B4-BE49-F238E27FC236}">
-                <a16:creationId xmlns:a16="http://schemas.microsoft.com/office/drawing/2014/main" id="{7456F6CE-BAB2-4441-BC44-75E27DB81401}"/>
+                <a16:creationId xmlns:a16="http://schemas.microsoft.com/office/drawing/2014/main" id="{32D48C08-9061-4C72-8AF7-E7AEF4786F38}"/>
               </a:ext>
             </a:extLst>
           </p:cNvPr>
@@ -10925,7 +10925,7 @@
           <p:cNvPr id="17" name="">
             <a:extLst xmlns:a="http://schemas.openxmlformats.org/drawingml/2006/main">
               <a:ext uri="{FF2B5EF4-FFF2-40B4-BE49-F238E27FC236}">
-                <a16:creationId xmlns:a16="http://schemas.microsoft.com/office/drawing/2014/main" id="{611E6E23-161B-4600-9FBD-0D70A2F26D76}"/>
+                <a16:creationId xmlns:a16="http://schemas.microsoft.com/office/drawing/2014/main" id="{89305094-B140-4DAE-9B55-45AADEE52710}"/>
               </a:ext>
             </a:extLst>
           </p:cNvPr>
@@ -10983,7 +10983,7 @@
           <p:cNvPr id="18" name="">
             <a:extLst xmlns:a="http://schemas.openxmlformats.org/drawingml/2006/main">
               <a:ext uri="{FF2B5EF4-FFF2-40B4-BE49-F238E27FC236}">
-                <a16:creationId xmlns:a16="http://schemas.microsoft.com/office/drawing/2014/main" id="{32C3CF02-BC3C-4216-8305-1AE29B387F2E}"/>
+                <a16:creationId xmlns:a16="http://schemas.microsoft.com/office/drawing/2014/main" id="{44AF67CC-068D-4984-961C-6C3BCB9DC432}"/>
               </a:ext>
             </a:extLst>
           </p:cNvPr>
@@ -11021,14 +11021,14 @@
             <a:pPr algn="l">
               <a:defRPr sz="1050" b="1">
                 <a:solidFill>
-                  <a:srgbClr val="0E1B3E"/>
+                  <a:srgbClr val="070F26"/>
                 </a:solidFill>
               </a:defRPr>
             </a:pPr>
             <a:r>
               <a:rPr sz="1050" b="1">
                 <a:solidFill>
-                  <a:srgbClr val="0E1B3E"/>
+                  <a:srgbClr val="070F26"/>
                 </a:solidFill>
               </a:rPr>
               <a:t>Implementar — 45 min</a:t>
@@ -11041,7 +11041,7 @@
           <p:cNvPr id="19" name="">
             <a:extLst xmlns:a="http://schemas.openxmlformats.org/drawingml/2006/main">
               <a:ext uri="{FF2B5EF4-FFF2-40B4-BE49-F238E27FC236}">
-                <a16:creationId xmlns:a16="http://schemas.microsoft.com/office/drawing/2014/main" id="{49E42673-C8FA-4461-AE65-AB5D13884FA9}"/>
+                <a16:creationId xmlns:a16="http://schemas.microsoft.com/office/drawing/2014/main" id="{47F3DE5C-8706-4704-8540-C2B92B7E43C0}"/>
               </a:ext>
             </a:extLst>
           </p:cNvPr>
@@ -11133,7 +11133,7 @@
           <p:cNvPr id="20" name="">
             <a:extLst xmlns:a="http://schemas.openxmlformats.org/drawingml/2006/main">
               <a:ext uri="{FF2B5EF4-FFF2-40B4-BE49-F238E27FC236}">
-                <a16:creationId xmlns:a16="http://schemas.microsoft.com/office/drawing/2014/main" id="{9473ABBC-B045-457D-985C-8B7DF7021F2E}"/>
+                <a16:creationId xmlns:a16="http://schemas.microsoft.com/office/drawing/2014/main" id="{5BCA811E-2E6C-4532-98D2-F6A6C8A38B36}"/>
               </a:ext>
             </a:extLst>
           </p:cNvPr>
@@ -11166,7 +11166,7 @@
           <p:cNvPr id="21" name="">
             <a:extLst xmlns:a="http://schemas.openxmlformats.org/drawingml/2006/main">
               <a:ext uri="{FF2B5EF4-FFF2-40B4-BE49-F238E27FC236}">
-                <a16:creationId xmlns:a16="http://schemas.microsoft.com/office/drawing/2014/main" id="{E8C42701-4AFB-4CA9-826F-FB989D5A211A}"/>
+                <a16:creationId xmlns:a16="http://schemas.microsoft.com/office/drawing/2014/main" id="{B453C0A2-D97C-4F66-9AF0-61891F25F089}"/>
               </a:ext>
             </a:extLst>
           </p:cNvPr>
@@ -11201,7 +11201,7 @@
           <p:cNvPr id="22" name="">
             <a:extLst xmlns:a="http://schemas.openxmlformats.org/drawingml/2006/main">
               <a:ext uri="{FF2B5EF4-FFF2-40B4-BE49-F238E27FC236}">
-                <a16:creationId xmlns:a16="http://schemas.microsoft.com/office/drawing/2014/main" id="{9D23CA5F-C9BD-41B1-BFCC-2F4F4A39E92B}"/>
+                <a16:creationId xmlns:a16="http://schemas.microsoft.com/office/drawing/2014/main" id="{0A38E273-AB93-4B2A-A2C2-6E5436FCDDAA}"/>
               </a:ext>
             </a:extLst>
           </p:cNvPr>
@@ -11259,7 +11259,7 @@
           <p:cNvPr id="23" name="">
             <a:extLst xmlns:a="http://schemas.openxmlformats.org/drawingml/2006/main">
               <a:ext uri="{FF2B5EF4-FFF2-40B4-BE49-F238E27FC236}">
-                <a16:creationId xmlns:a16="http://schemas.microsoft.com/office/drawing/2014/main" id="{1ABF3B54-4CFE-4EA1-8167-74EF946C58C8}"/>
+                <a16:creationId xmlns:a16="http://schemas.microsoft.com/office/drawing/2014/main" id="{A0D80E01-1997-4498-B21D-2BCBC1167D25}"/>
               </a:ext>
             </a:extLst>
           </p:cNvPr>
@@ -11297,14 +11297,14 @@
             <a:pPr algn="l">
               <a:defRPr sz="1050" b="1">
                 <a:solidFill>
-                  <a:srgbClr val="0E1B3E"/>
+                  <a:srgbClr val="070F26"/>
                 </a:solidFill>
               </a:defRPr>
             </a:pPr>
             <a:r>
               <a:rPr sz="1050" b="1">
                 <a:solidFill>
-                  <a:srgbClr val="0E1B3E"/>
+                  <a:srgbClr val="070F26"/>
                 </a:solidFill>
               </a:rPr>
               <a:t>Versionar — 20 min</a:t>
@@ -11317,7 +11317,7 @@
           <p:cNvPr id="24" name="">
             <a:extLst xmlns:a="http://schemas.openxmlformats.org/drawingml/2006/main">
               <a:ext uri="{FF2B5EF4-FFF2-40B4-BE49-F238E27FC236}">
-                <a16:creationId xmlns:a16="http://schemas.microsoft.com/office/drawing/2014/main" id="{F012ED90-52FC-4F4E-B1A6-489F62D6AD72}"/>
+                <a16:creationId xmlns:a16="http://schemas.microsoft.com/office/drawing/2014/main" id="{12B2FD69-4F9B-4422-B9F9-B05D5BC3FB61}"/>
               </a:ext>
             </a:extLst>
           </p:cNvPr>
@@ -11407,7 +11407,7 @@
     </p:spTree>
     <p:extLst>
       <p:ext uri="{BB962C8B-B14F-4D97-AF65-F5344CB8AC3E}">
-        <p14:creationId xmlns:p14="http://schemas.microsoft.com/office/powerpoint/2010/main" val="982378254"/>
+        <p14:creationId xmlns:p14="http://schemas.microsoft.com/office/powerpoint/2010/main" val="719547326"/>
       </p:ext>
     </p:extLst>
   </p:cSld>
@@ -11438,7 +11438,7 @@
           <p:cNvPr id="1" name="">
             <a:extLst xmlns:a="http://schemas.openxmlformats.org/drawingml/2006/main">
               <a:ext uri="{FF2B5EF4-FFF2-40B4-BE49-F238E27FC236}">
-                <a16:creationId xmlns:a16="http://schemas.microsoft.com/office/drawing/2014/main" id="{373DD893-4EB5-4E58-B028-1CC1A924F2BC}"/>
+                <a16:creationId xmlns:a16="http://schemas.microsoft.com/office/drawing/2014/main" id="{66DF66AA-19BE-483D-B1C1-B9DC7CE767E4}"/>
               </a:ext>
             </a:extLst>
           </p:cNvPr>
@@ -11477,7 +11477,7 @@
           <p:nvPr/>
         </p:nvPicPr>
         <p:blipFill>
-          <a:blip xmlns:r="http://schemas.openxmlformats.org/officeDocument/2006/relationships" xmlns:a="http://schemas.openxmlformats.org/drawingml/2006/main" r:embed="R6616042c780b4958"/>
+          <a:blip xmlns:r="http://schemas.openxmlformats.org/officeDocument/2006/relationships" xmlns:a="http://schemas.openxmlformats.org/drawingml/2006/main" r:embed="R772ae36b00534b4e"/>
           <a:stretch xmlns:a="http://schemas.openxmlformats.org/drawingml/2006/main"/>
         </p:blipFill>
         <p:spPr>
@@ -11495,7 +11495,7 @@
           <p:cNvPr id="3" name="">
             <a:extLst xmlns:a="http://schemas.openxmlformats.org/drawingml/2006/main">
               <a:ext uri="{FF2B5EF4-FFF2-40B4-BE49-F238E27FC236}">
-                <a16:creationId xmlns:a16="http://schemas.microsoft.com/office/drawing/2014/main" id="{7FBDFBAA-40CA-4055-8889-AC973706EFE5}"/>
+                <a16:creationId xmlns:a16="http://schemas.microsoft.com/office/drawing/2014/main" id="{BC8B6CC7-9842-4E3F-A0EB-09C02FA85113}"/>
               </a:ext>
             </a:extLst>
           </p:cNvPr>
@@ -11533,14 +11533,14 @@
             <a:pPr algn="r">
               <a:defRPr sz="825" b="1">
                 <a:solidFill>
-                  <a:srgbClr val="0E1B3E"/>
+                  <a:srgbClr val="070F26"/>
                 </a:solidFill>
               </a:defRPr>
             </a:pPr>
             <a:r>
               <a:rPr sz="825" b="1">
                 <a:solidFill>
-                  <a:srgbClr val="0E1B3E"/>
+                  <a:srgbClr val="070F26"/>
                 </a:solidFill>
               </a:rPr>
               <a:t>NTT DATA UNIVERSITY</a:t>
@@ -11553,7 +11553,7 @@
           <p:cNvPr id="4" name="">
             <a:extLst xmlns:a="http://schemas.openxmlformats.org/drawingml/2006/main">
               <a:ext uri="{FF2B5EF4-FFF2-40B4-BE49-F238E27FC236}">
-                <a16:creationId xmlns:a16="http://schemas.microsoft.com/office/drawing/2014/main" id="{E5354969-80B6-4258-B195-88F0427F0E17}"/>
+                <a16:creationId xmlns:a16="http://schemas.microsoft.com/office/drawing/2014/main" id="{613D001F-1FF5-48C8-9F87-BEA89F8FC0C6}"/>
               </a:ext>
             </a:extLst>
           </p:cNvPr>
@@ -11611,7 +11611,7 @@
           <p:cNvPr id="5" name="">
             <a:extLst xmlns:a="http://schemas.openxmlformats.org/drawingml/2006/main">
               <a:ext uri="{FF2B5EF4-FFF2-40B4-BE49-F238E27FC236}">
-                <a16:creationId xmlns:a16="http://schemas.microsoft.com/office/drawing/2014/main" id="{219D2B72-9677-47B8-BE15-5E752227CE2E}"/>
+                <a16:creationId xmlns:a16="http://schemas.microsoft.com/office/drawing/2014/main" id="{A8926D42-68C8-4F9C-BE17-CC191EB13224}"/>
               </a:ext>
             </a:extLst>
           </p:cNvPr>
@@ -11669,7 +11669,7 @@
           <p:cNvPr id="6" name="">
             <a:extLst xmlns:a="http://schemas.openxmlformats.org/drawingml/2006/main">
               <a:ext uri="{FF2B5EF4-FFF2-40B4-BE49-F238E27FC236}">
-                <a16:creationId xmlns:a16="http://schemas.microsoft.com/office/drawing/2014/main" id="{9CCBB8AF-8805-41E8-8335-74EC3CB8EDF8}"/>
+                <a16:creationId xmlns:a16="http://schemas.microsoft.com/office/drawing/2014/main" id="{967567D7-74E9-4EF8-A66C-1316AA01765B}"/>
               </a:ext>
             </a:extLst>
           </p:cNvPr>
@@ -11707,14 +11707,14 @@
             <a:pPr algn="r">
               <a:defRPr sz="675" b="1">
                 <a:solidFill>
-                  <a:srgbClr val="0E1B3E"/>
+                  <a:srgbClr val="070F26"/>
                 </a:solidFill>
               </a:defRPr>
             </a:pPr>
             <a:r>
               <a:rPr sz="675" b="1">
                 <a:solidFill>
-                  <a:srgbClr val="0E1B3E"/>
+                  <a:srgbClr val="070F26"/>
                 </a:solidFill>
               </a:rPr>
               <a:t>NTT DATA UNIVERSITY</a:t>
@@ -11727,7 +11727,7 @@
           <p:cNvPr id="7" name="">
             <a:extLst xmlns:a="http://schemas.openxmlformats.org/drawingml/2006/main">
               <a:ext uri="{FF2B5EF4-FFF2-40B4-BE49-F238E27FC236}">
-                <a16:creationId xmlns:a16="http://schemas.microsoft.com/office/drawing/2014/main" id="{FA955416-7924-4385-91B9-246993B773E2}"/>
+                <a16:creationId xmlns:a16="http://schemas.microsoft.com/office/drawing/2014/main" id="{1895183D-0840-45CB-8F48-77A3817B9C9B}"/>
               </a:ext>
             </a:extLst>
           </p:cNvPr>
@@ -11785,7 +11785,7 @@
           <p:cNvPr id="8" name="">
             <a:extLst xmlns:a="http://schemas.openxmlformats.org/drawingml/2006/main">
               <a:ext uri="{FF2B5EF4-FFF2-40B4-BE49-F238E27FC236}">
-                <a16:creationId xmlns:a16="http://schemas.microsoft.com/office/drawing/2014/main" id="{3FAC83D9-2339-41DA-94FA-114D96810014}"/>
+                <a16:creationId xmlns:a16="http://schemas.microsoft.com/office/drawing/2014/main" id="{4C673F1C-3699-4063-92DD-BEABFDC7B4CD}"/>
               </a:ext>
             </a:extLst>
           </p:cNvPr>
@@ -11823,14 +11823,14 @@
             <a:pPr algn="l">
               <a:defRPr sz="2400" b="0">
                 <a:solidFill>
-                  <a:srgbClr val="0E1B3E"/>
+                  <a:srgbClr val="070F26"/>
                 </a:solidFill>
               </a:defRPr>
             </a:pPr>
             <a:r>
               <a:rPr sz="2400" b="0">
                 <a:solidFill>
-                  <a:srgbClr val="0E1B3E"/>
+                  <a:srgbClr val="070F26"/>
                 </a:solidFill>
               </a:rPr>
               <a:t>DAG do pipeline de vendas</a:t>
@@ -11843,7 +11843,7 @@
           <p:cNvPr id="9" name="">
             <a:extLst xmlns:a="http://schemas.openxmlformats.org/drawingml/2006/main">
               <a:ext uri="{FF2B5EF4-FFF2-40B4-BE49-F238E27FC236}">
-                <a16:creationId xmlns:a16="http://schemas.microsoft.com/office/drawing/2014/main" id="{6253753F-82E6-45B3-89B9-CE293632F6A2}"/>
+                <a16:creationId xmlns:a16="http://schemas.microsoft.com/office/drawing/2014/main" id="{230927BF-FCB5-4D3F-AD1C-09CFA78BABF3}"/>
               </a:ext>
             </a:extLst>
           </p:cNvPr>
@@ -11901,7 +11901,7 @@
           <p:cNvPr id="10" name="">
             <a:extLst xmlns:a="http://schemas.openxmlformats.org/drawingml/2006/main">
               <a:ext uri="{FF2B5EF4-FFF2-40B4-BE49-F238E27FC236}">
-                <a16:creationId xmlns:a16="http://schemas.microsoft.com/office/drawing/2014/main" id="{8EAF398F-46A8-484A-B7A9-26B7E6A5F754}"/>
+                <a16:creationId xmlns:a16="http://schemas.microsoft.com/office/drawing/2014/main" id="{4F07CCC5-DF51-4F13-8DE1-82C698FDBEBF}"/>
               </a:ext>
             </a:extLst>
           </p:cNvPr>
@@ -11934,7 +11934,7 @@
           <p:cNvPr id="11" name="">
             <a:extLst xmlns:a="http://schemas.openxmlformats.org/drawingml/2006/main">
               <a:ext uri="{FF2B5EF4-FFF2-40B4-BE49-F238E27FC236}">
-                <a16:creationId xmlns:a16="http://schemas.microsoft.com/office/drawing/2014/main" id="{1679E819-3DD2-4CB2-8C0F-82E31D45782C}"/>
+                <a16:creationId xmlns:a16="http://schemas.microsoft.com/office/drawing/2014/main" id="{892DB91B-7064-4569-B025-010A2E906FDA}"/>
               </a:ext>
             </a:extLst>
           </p:cNvPr>
@@ -11969,7 +11969,7 @@
           <p:cNvPr id="12" name="">
             <a:extLst xmlns:a="http://schemas.openxmlformats.org/drawingml/2006/main">
               <a:ext uri="{FF2B5EF4-FFF2-40B4-BE49-F238E27FC236}">
-                <a16:creationId xmlns:a16="http://schemas.microsoft.com/office/drawing/2014/main" id="{0A996D18-AE6C-4515-91ED-9F03264E70EC}"/>
+                <a16:creationId xmlns:a16="http://schemas.microsoft.com/office/drawing/2014/main" id="{D7691661-0F92-44D3-92FB-8FD1C9BADE44}"/>
               </a:ext>
             </a:extLst>
           </p:cNvPr>
@@ -12027,7 +12027,7 @@
           <p:cNvPr id="13" name="">
             <a:extLst xmlns:a="http://schemas.openxmlformats.org/drawingml/2006/main">
               <a:ext uri="{FF2B5EF4-FFF2-40B4-BE49-F238E27FC236}">
-                <a16:creationId xmlns:a16="http://schemas.microsoft.com/office/drawing/2014/main" id="{11D4458B-C70A-4055-B85D-A8C7EFDC2330}"/>
+                <a16:creationId xmlns:a16="http://schemas.microsoft.com/office/drawing/2014/main" id="{593B1DDA-E010-4AE9-877D-4C56D2FB5D7C}"/>
               </a:ext>
             </a:extLst>
           </p:cNvPr>
@@ -12221,7 +12221,7 @@
           <p:cNvPr id="14" name="">
             <a:extLst xmlns:a="http://schemas.openxmlformats.org/drawingml/2006/main">
               <a:ext uri="{FF2B5EF4-FFF2-40B4-BE49-F238E27FC236}">
-                <a16:creationId xmlns:a16="http://schemas.microsoft.com/office/drawing/2014/main" id="{8BCE43B7-1358-47AE-90E4-EB77271FF308}"/>
+                <a16:creationId xmlns:a16="http://schemas.microsoft.com/office/drawing/2014/main" id="{DCBFC6DD-C078-484C-8865-79A20E86F64C}"/>
               </a:ext>
             </a:extLst>
           </p:cNvPr>
@@ -12254,7 +12254,7 @@
           <p:cNvPr id="15" name="">
             <a:extLst xmlns:a="http://schemas.openxmlformats.org/drawingml/2006/main">
               <a:ext uri="{FF2B5EF4-FFF2-40B4-BE49-F238E27FC236}">
-                <a16:creationId xmlns:a16="http://schemas.microsoft.com/office/drawing/2014/main" id="{F323CA46-F6A6-4E58-A236-05A60897ED1D}"/>
+                <a16:creationId xmlns:a16="http://schemas.microsoft.com/office/drawing/2014/main" id="{34B56076-DEDB-4F53-A066-F4D9775347A6}"/>
               </a:ext>
             </a:extLst>
           </p:cNvPr>
@@ -12289,7 +12289,7 @@
           <p:cNvPr id="16" name="">
             <a:extLst xmlns:a="http://schemas.openxmlformats.org/drawingml/2006/main">
               <a:ext uri="{FF2B5EF4-FFF2-40B4-BE49-F238E27FC236}">
-                <a16:creationId xmlns:a16="http://schemas.microsoft.com/office/drawing/2014/main" id="{C950E11E-E540-4DE1-A742-683B0DE2F350}"/>
+                <a16:creationId xmlns:a16="http://schemas.microsoft.com/office/drawing/2014/main" id="{70768446-91FC-4A66-9FC2-241E2B082A9D}"/>
               </a:ext>
             </a:extLst>
           </p:cNvPr>
@@ -12347,7 +12347,7 @@
           <p:cNvPr id="17" name="">
             <a:extLst xmlns:a="http://schemas.openxmlformats.org/drawingml/2006/main">
               <a:ext uri="{FF2B5EF4-FFF2-40B4-BE49-F238E27FC236}">
-                <a16:creationId xmlns:a16="http://schemas.microsoft.com/office/drawing/2014/main" id="{9B61BA85-28FC-4E4F-A7BB-AD4255D6E7C0}"/>
+                <a16:creationId xmlns:a16="http://schemas.microsoft.com/office/drawing/2014/main" id="{EB5027AE-ADF0-4CE2-BE7B-039304C4BF55}"/>
               </a:ext>
             </a:extLst>
           </p:cNvPr>
@@ -12549,7 +12549,7 @@
     </p:spTree>
     <p:extLst>
       <p:ext uri="{BB962C8B-B14F-4D97-AF65-F5344CB8AC3E}">
-        <p14:creationId xmlns:p14="http://schemas.microsoft.com/office/powerpoint/2010/main" val="411135451"/>
+        <p14:creationId xmlns:p14="http://schemas.microsoft.com/office/powerpoint/2010/main" val="1504201327"/>
       </p:ext>
     </p:extLst>
   </p:cSld>
@@ -12580,7 +12580,7 @@
           <p:cNvPr id="1" name="">
             <a:extLst xmlns:a="http://schemas.openxmlformats.org/drawingml/2006/main">
               <a:ext uri="{FF2B5EF4-FFF2-40B4-BE49-F238E27FC236}">
-                <a16:creationId xmlns:a16="http://schemas.microsoft.com/office/drawing/2014/main" id="{42882747-B3A0-47AE-B1C1-030BBDEC3ADF}"/>
+                <a16:creationId xmlns:a16="http://schemas.microsoft.com/office/drawing/2014/main" id="{461FDAA1-4F4A-4449-BBD7-8B26CCEDEE21}"/>
               </a:ext>
             </a:extLst>
           </p:cNvPr>
@@ -12619,7 +12619,7 @@
           <p:nvPr/>
         </p:nvPicPr>
         <p:blipFill>
-          <a:blip xmlns:r="http://schemas.openxmlformats.org/officeDocument/2006/relationships" xmlns:a="http://schemas.openxmlformats.org/drawingml/2006/main" r:embed="Re212aebf07a741d4"/>
+          <a:blip xmlns:r="http://schemas.openxmlformats.org/officeDocument/2006/relationships" xmlns:a="http://schemas.openxmlformats.org/drawingml/2006/main" r:embed="R4e17621523ba4ca2"/>
           <a:stretch xmlns:a="http://schemas.openxmlformats.org/drawingml/2006/main"/>
         </p:blipFill>
         <p:spPr>
@@ -12637,7 +12637,7 @@
           <p:cNvPr id="3" name="">
             <a:extLst xmlns:a="http://schemas.openxmlformats.org/drawingml/2006/main">
               <a:ext uri="{FF2B5EF4-FFF2-40B4-BE49-F238E27FC236}">
-                <a16:creationId xmlns:a16="http://schemas.microsoft.com/office/drawing/2014/main" id="{8F2CEA5D-6663-4659-9501-FEE74222DC45}"/>
+                <a16:creationId xmlns:a16="http://schemas.microsoft.com/office/drawing/2014/main" id="{18AC5932-F557-4809-8363-D297B464D64B}"/>
               </a:ext>
             </a:extLst>
           </p:cNvPr>
@@ -12675,14 +12675,14 @@
             <a:pPr algn="r">
               <a:defRPr sz="825" b="1">
                 <a:solidFill>
-                  <a:srgbClr val="0E1B3E"/>
+                  <a:srgbClr val="070F26"/>
                 </a:solidFill>
               </a:defRPr>
             </a:pPr>
             <a:r>
               <a:rPr sz="825" b="1">
                 <a:solidFill>
-                  <a:srgbClr val="0E1B3E"/>
+                  <a:srgbClr val="070F26"/>
                 </a:solidFill>
               </a:rPr>
               <a:t>NTT DATA UNIVERSITY</a:t>
@@ -12695,7 +12695,7 @@
           <p:cNvPr id="4" name="">
             <a:extLst xmlns:a="http://schemas.openxmlformats.org/drawingml/2006/main">
               <a:ext uri="{FF2B5EF4-FFF2-40B4-BE49-F238E27FC236}">
-                <a16:creationId xmlns:a16="http://schemas.microsoft.com/office/drawing/2014/main" id="{714A95EA-3B86-4436-9A7A-A54C12FB06AA}"/>
+                <a16:creationId xmlns:a16="http://schemas.microsoft.com/office/drawing/2014/main" id="{6AE11813-6104-4A2B-85B3-02B965027DCC}"/>
               </a:ext>
             </a:extLst>
           </p:cNvPr>
@@ -12753,7 +12753,7 @@
           <p:cNvPr id="5" name="">
             <a:extLst xmlns:a="http://schemas.openxmlformats.org/drawingml/2006/main">
               <a:ext uri="{FF2B5EF4-FFF2-40B4-BE49-F238E27FC236}">
-                <a16:creationId xmlns:a16="http://schemas.microsoft.com/office/drawing/2014/main" id="{8E2CA8F4-F543-403B-B612-2C4FAB2EDA86}"/>
+                <a16:creationId xmlns:a16="http://schemas.microsoft.com/office/drawing/2014/main" id="{732F6D01-8CC6-4596-9448-97860B9D8295}"/>
               </a:ext>
             </a:extLst>
           </p:cNvPr>
@@ -12811,7 +12811,7 @@
           <p:cNvPr id="6" name="">
             <a:extLst xmlns:a="http://schemas.openxmlformats.org/drawingml/2006/main">
               <a:ext uri="{FF2B5EF4-FFF2-40B4-BE49-F238E27FC236}">
-                <a16:creationId xmlns:a16="http://schemas.microsoft.com/office/drawing/2014/main" id="{0E8D1709-E7DC-4E42-8CEC-3FA58725B135}"/>
+                <a16:creationId xmlns:a16="http://schemas.microsoft.com/office/drawing/2014/main" id="{4E67A433-D11D-4723-A166-4154B9989C37}"/>
               </a:ext>
             </a:extLst>
           </p:cNvPr>
@@ -12849,14 +12849,14 @@
             <a:pPr algn="r">
               <a:defRPr sz="675" b="1">
                 <a:solidFill>
-                  <a:srgbClr val="0E1B3E"/>
+                  <a:srgbClr val="070F26"/>
                 </a:solidFill>
               </a:defRPr>
             </a:pPr>
             <a:r>
               <a:rPr sz="675" b="1">
                 <a:solidFill>
-                  <a:srgbClr val="0E1B3E"/>
+                  <a:srgbClr val="070F26"/>
                 </a:solidFill>
               </a:rPr>
               <a:t>NTT DATA UNIVERSITY</a:t>
@@ -12869,7 +12869,7 @@
           <p:cNvPr id="7" name="">
             <a:extLst xmlns:a="http://schemas.openxmlformats.org/drawingml/2006/main">
               <a:ext uri="{FF2B5EF4-FFF2-40B4-BE49-F238E27FC236}">
-                <a16:creationId xmlns:a16="http://schemas.microsoft.com/office/drawing/2014/main" id="{A6D37C2B-4761-4DA0-AEA6-EBA50636F3AB}"/>
+                <a16:creationId xmlns:a16="http://schemas.microsoft.com/office/drawing/2014/main" id="{64FD5C05-7CD9-4C38-B946-02705AC6F4A4}"/>
               </a:ext>
             </a:extLst>
           </p:cNvPr>
@@ -12927,7 +12927,7 @@
           <p:cNvPr id="8" name="">
             <a:extLst xmlns:a="http://schemas.openxmlformats.org/drawingml/2006/main">
               <a:ext uri="{FF2B5EF4-FFF2-40B4-BE49-F238E27FC236}">
-                <a16:creationId xmlns:a16="http://schemas.microsoft.com/office/drawing/2014/main" id="{17AE64FF-8DAB-4C73-BEF6-F75FA5B610BF}"/>
+                <a16:creationId xmlns:a16="http://schemas.microsoft.com/office/drawing/2014/main" id="{642C1829-031D-4FF3-9A30-F8FCFCB0D10D}"/>
               </a:ext>
             </a:extLst>
           </p:cNvPr>
@@ -12965,14 +12965,14 @@
             <a:pPr algn="l">
               <a:defRPr sz="2400" b="0">
                 <a:solidFill>
-                  <a:srgbClr val="0E1B3E"/>
+                  <a:srgbClr val="070F26"/>
                 </a:solidFill>
               </a:defRPr>
             </a:pPr>
             <a:r>
               <a:rPr sz="2400" b="0">
                 <a:solidFill>
-                  <a:srgbClr val="0E1B3E"/>
+                  <a:srgbClr val="070F26"/>
                 </a:solidFill>
               </a:rPr>
               <a:t>Perguntas — uma para cada decisão do DAG</a:t>
@@ -12985,7 +12985,7 @@
           <p:cNvPr id="9" name="">
             <a:extLst xmlns:a="http://schemas.openxmlformats.org/drawingml/2006/main">
               <a:ext uri="{FF2B5EF4-FFF2-40B4-BE49-F238E27FC236}">
-                <a16:creationId xmlns:a16="http://schemas.microsoft.com/office/drawing/2014/main" id="{5F2FC2CF-EB9B-4BAC-A549-A4ABB66FA708}"/>
+                <a16:creationId xmlns:a16="http://schemas.microsoft.com/office/drawing/2014/main" id="{4BE958FE-9C2F-49FA-AD51-4F2AD632440B}"/>
               </a:ext>
             </a:extLst>
           </p:cNvPr>
@@ -13043,7 +13043,7 @@
           <p:cNvPr id="10" name="">
             <a:extLst xmlns:a="http://schemas.openxmlformats.org/drawingml/2006/main">
               <a:ext uri="{FF2B5EF4-FFF2-40B4-BE49-F238E27FC236}">
-                <a16:creationId xmlns:a16="http://schemas.microsoft.com/office/drawing/2014/main" id="{992F22DD-25F6-409A-814B-1473CFB5BEA3}"/>
+                <a16:creationId xmlns:a16="http://schemas.microsoft.com/office/drawing/2014/main" id="{3B28FEBC-ADC1-40B4-A737-E627532DAAAE}"/>
               </a:ext>
             </a:extLst>
           </p:cNvPr>
@@ -13076,7 +13076,7 @@
           <p:cNvPr id="11" name="">
             <a:extLst xmlns:a="http://schemas.openxmlformats.org/drawingml/2006/main">
               <a:ext uri="{FF2B5EF4-FFF2-40B4-BE49-F238E27FC236}">
-                <a16:creationId xmlns:a16="http://schemas.microsoft.com/office/drawing/2014/main" id="{6B5019D6-CF43-4480-98A0-AF7D79BCAD8D}"/>
+                <a16:creationId xmlns:a16="http://schemas.microsoft.com/office/drawing/2014/main" id="{7DC3E591-93E9-4587-8180-F099662A0248}"/>
               </a:ext>
             </a:extLst>
           </p:cNvPr>
@@ -13111,7 +13111,7 @@
           <p:cNvPr id="12" name="">
             <a:extLst xmlns:a="http://schemas.openxmlformats.org/drawingml/2006/main">
               <a:ext uri="{FF2B5EF4-FFF2-40B4-BE49-F238E27FC236}">
-                <a16:creationId xmlns:a16="http://schemas.microsoft.com/office/drawing/2014/main" id="{60D02FF1-783D-4D2B-9165-0B9CE5F470C2}"/>
+                <a16:creationId xmlns:a16="http://schemas.microsoft.com/office/drawing/2014/main" id="{485481C7-4B77-4512-AC13-09CE7DE79CBC}"/>
               </a:ext>
             </a:extLst>
           </p:cNvPr>
@@ -13169,7 +13169,7 @@
           <p:cNvPr id="13" name="">
             <a:extLst xmlns:a="http://schemas.openxmlformats.org/drawingml/2006/main">
               <a:ext uri="{FF2B5EF4-FFF2-40B4-BE49-F238E27FC236}">
-                <a16:creationId xmlns:a16="http://schemas.microsoft.com/office/drawing/2014/main" id="{5ED4361B-F605-4273-A79F-430B1C9BFE96}"/>
+                <a16:creationId xmlns:a16="http://schemas.microsoft.com/office/drawing/2014/main" id="{C87FD068-8A25-4E98-826B-AE2CB4BD6E71}"/>
               </a:ext>
             </a:extLst>
           </p:cNvPr>
@@ -13261,7 +13261,7 @@
           <p:cNvPr id="14" name="">
             <a:extLst xmlns:a="http://schemas.openxmlformats.org/drawingml/2006/main">
               <a:ext uri="{FF2B5EF4-FFF2-40B4-BE49-F238E27FC236}">
-                <a16:creationId xmlns:a16="http://schemas.microsoft.com/office/drawing/2014/main" id="{6D189B8C-2FF8-4E29-BE9B-71D84BC3EE91}"/>
+                <a16:creationId xmlns:a16="http://schemas.microsoft.com/office/drawing/2014/main" id="{7A1AC986-193B-47A9-BEF6-A0A54ADC5AE6}"/>
               </a:ext>
             </a:extLst>
           </p:cNvPr>
@@ -13294,7 +13294,7 @@
           <p:cNvPr id="15" name="">
             <a:extLst xmlns:a="http://schemas.openxmlformats.org/drawingml/2006/main">
               <a:ext uri="{FF2B5EF4-FFF2-40B4-BE49-F238E27FC236}">
-                <a16:creationId xmlns:a16="http://schemas.microsoft.com/office/drawing/2014/main" id="{5C12D6C9-08A3-4ECD-9FCF-02749DC9D02F}"/>
+                <a16:creationId xmlns:a16="http://schemas.microsoft.com/office/drawing/2014/main" id="{5577FC4F-2B98-4CD4-A586-3094C3603842}"/>
               </a:ext>
             </a:extLst>
           </p:cNvPr>
@@ -13329,7 +13329,7 @@
           <p:cNvPr id="16" name="">
             <a:extLst xmlns:a="http://schemas.openxmlformats.org/drawingml/2006/main">
               <a:ext uri="{FF2B5EF4-FFF2-40B4-BE49-F238E27FC236}">
-                <a16:creationId xmlns:a16="http://schemas.microsoft.com/office/drawing/2014/main" id="{80B00BE7-CFA5-4CF8-8EA4-65277BF6CE12}"/>
+                <a16:creationId xmlns:a16="http://schemas.microsoft.com/office/drawing/2014/main" id="{0B29928D-00D2-4543-AD5A-55F11301D366}"/>
               </a:ext>
             </a:extLst>
           </p:cNvPr>
@@ -13387,7 +13387,7 @@
           <p:cNvPr id="17" name="">
             <a:extLst xmlns:a="http://schemas.openxmlformats.org/drawingml/2006/main">
               <a:ext uri="{FF2B5EF4-FFF2-40B4-BE49-F238E27FC236}">
-                <a16:creationId xmlns:a16="http://schemas.microsoft.com/office/drawing/2014/main" id="{B8F1183E-32E4-4145-885C-1FA789AF7146}"/>
+                <a16:creationId xmlns:a16="http://schemas.microsoft.com/office/drawing/2014/main" id="{BF573070-372A-477A-A35D-E2958143D7B5}"/>
               </a:ext>
             </a:extLst>
           </p:cNvPr>
@@ -13479,7 +13479,7 @@
           <p:cNvPr id="18" name="">
             <a:extLst xmlns:a="http://schemas.openxmlformats.org/drawingml/2006/main">
               <a:ext uri="{FF2B5EF4-FFF2-40B4-BE49-F238E27FC236}">
-                <a16:creationId xmlns:a16="http://schemas.microsoft.com/office/drawing/2014/main" id="{8DCF71DA-07A1-454F-A432-8ADC8CBD102B}"/>
+                <a16:creationId xmlns:a16="http://schemas.microsoft.com/office/drawing/2014/main" id="{264C1C37-F106-4ACC-9768-A2BBB22CCC52}"/>
               </a:ext>
             </a:extLst>
           </p:cNvPr>
@@ -13512,7 +13512,7 @@
           <p:cNvPr id="19" name="">
             <a:extLst xmlns:a="http://schemas.openxmlformats.org/drawingml/2006/main">
               <a:ext uri="{FF2B5EF4-FFF2-40B4-BE49-F238E27FC236}">
-                <a16:creationId xmlns:a16="http://schemas.microsoft.com/office/drawing/2014/main" id="{3E02D1CA-8423-4A53-995D-7D545E0EC8D9}"/>
+                <a16:creationId xmlns:a16="http://schemas.microsoft.com/office/drawing/2014/main" id="{A7A27693-8422-4696-87C4-543F0D07CD15}"/>
               </a:ext>
             </a:extLst>
           </p:cNvPr>
@@ -13547,7 +13547,7 @@
           <p:cNvPr id="20" name="">
             <a:extLst xmlns:a="http://schemas.openxmlformats.org/drawingml/2006/main">
               <a:ext uri="{FF2B5EF4-FFF2-40B4-BE49-F238E27FC236}">
-                <a16:creationId xmlns:a16="http://schemas.microsoft.com/office/drawing/2014/main" id="{8EECA2E7-FA9F-4F7F-AC93-E69CF3CE4087}"/>
+                <a16:creationId xmlns:a16="http://schemas.microsoft.com/office/drawing/2014/main" id="{ACDDE6CD-94CB-4B07-AE42-6134FD66EBCA}"/>
               </a:ext>
             </a:extLst>
           </p:cNvPr>
@@ -13605,7 +13605,7 @@
           <p:cNvPr id="21" name="">
             <a:extLst xmlns:a="http://schemas.openxmlformats.org/drawingml/2006/main">
               <a:ext uri="{FF2B5EF4-FFF2-40B4-BE49-F238E27FC236}">
-                <a16:creationId xmlns:a16="http://schemas.microsoft.com/office/drawing/2014/main" id="{BDDB3072-C8EA-4082-BFDB-FA5BF1A045ED}"/>
+                <a16:creationId xmlns:a16="http://schemas.microsoft.com/office/drawing/2014/main" id="{12D55D88-087E-4DBE-A55B-E3E4327B25CE}"/>
               </a:ext>
             </a:extLst>
           </p:cNvPr>
@@ -13695,7 +13695,7 @@
     </p:spTree>
     <p:extLst>
       <p:ext uri="{BB962C8B-B14F-4D97-AF65-F5344CB8AC3E}">
-        <p14:creationId xmlns:p14="http://schemas.microsoft.com/office/powerpoint/2010/main" val="512975737"/>
+        <p14:creationId xmlns:p14="http://schemas.microsoft.com/office/powerpoint/2010/main" val="310998467"/>
       </p:ext>
     </p:extLst>
   </p:cSld>
@@ -13726,7 +13726,7 @@
           <p:cNvPr id="1" name="">
             <a:extLst xmlns:a="http://schemas.openxmlformats.org/drawingml/2006/main">
               <a:ext uri="{FF2B5EF4-FFF2-40B4-BE49-F238E27FC236}">
-                <a16:creationId xmlns:a16="http://schemas.microsoft.com/office/drawing/2014/main" id="{D71AF1D8-CBC8-4C3B-9BD6-6D2EDDD1F334}"/>
+                <a16:creationId xmlns:a16="http://schemas.microsoft.com/office/drawing/2014/main" id="{3037AFE2-2662-40E4-9A0C-019E9EB591CB}"/>
               </a:ext>
             </a:extLst>
           </p:cNvPr>
@@ -13765,7 +13765,7 @@
           <p:nvPr/>
         </p:nvPicPr>
         <p:blipFill>
-          <a:blip xmlns:r="http://schemas.openxmlformats.org/officeDocument/2006/relationships" xmlns:a="http://schemas.openxmlformats.org/drawingml/2006/main" r:embed="R6f1950d7b01b4e91"/>
+          <a:blip xmlns:r="http://schemas.openxmlformats.org/officeDocument/2006/relationships" xmlns:a="http://schemas.openxmlformats.org/drawingml/2006/main" r:embed="R84cbaa397e634d1c"/>
           <a:stretch xmlns:a="http://schemas.openxmlformats.org/drawingml/2006/main"/>
         </p:blipFill>
         <p:spPr>
@@ -13783,7 +13783,7 @@
           <p:cNvPr id="3" name="">
             <a:extLst xmlns:a="http://schemas.openxmlformats.org/drawingml/2006/main">
               <a:ext uri="{FF2B5EF4-FFF2-40B4-BE49-F238E27FC236}">
-                <a16:creationId xmlns:a16="http://schemas.microsoft.com/office/drawing/2014/main" id="{DD807FA8-20B9-4B44-8015-6F5AF0B57D61}"/>
+                <a16:creationId xmlns:a16="http://schemas.microsoft.com/office/drawing/2014/main" id="{DA4FA18C-B7D9-474A-8AA8-E197B99D3243}"/>
               </a:ext>
             </a:extLst>
           </p:cNvPr>
@@ -13821,14 +13821,14 @@
             <a:pPr algn="r">
               <a:defRPr sz="825" b="1">
                 <a:solidFill>
-                  <a:srgbClr val="0E1B3E"/>
+                  <a:srgbClr val="070F26"/>
                 </a:solidFill>
               </a:defRPr>
             </a:pPr>
             <a:r>
               <a:rPr sz="825" b="1">
                 <a:solidFill>
-                  <a:srgbClr val="0E1B3E"/>
+                  <a:srgbClr val="070F26"/>
                 </a:solidFill>
               </a:rPr>
               <a:t>NTT DATA UNIVERSITY</a:t>
@@ -13841,7 +13841,7 @@
           <p:cNvPr id="4" name="">
             <a:extLst xmlns:a="http://schemas.openxmlformats.org/drawingml/2006/main">
               <a:ext uri="{FF2B5EF4-FFF2-40B4-BE49-F238E27FC236}">
-                <a16:creationId xmlns:a16="http://schemas.microsoft.com/office/drawing/2014/main" id="{2F99EE1D-7B31-4338-9D50-EF7126FA54B4}"/>
+                <a16:creationId xmlns:a16="http://schemas.microsoft.com/office/drawing/2014/main" id="{540BF694-459C-4886-B6E4-697B7A121F72}"/>
               </a:ext>
             </a:extLst>
           </p:cNvPr>
@@ -13899,7 +13899,7 @@
           <p:cNvPr id="5" name="">
             <a:extLst xmlns:a="http://schemas.openxmlformats.org/drawingml/2006/main">
               <a:ext uri="{FF2B5EF4-FFF2-40B4-BE49-F238E27FC236}">
-                <a16:creationId xmlns:a16="http://schemas.microsoft.com/office/drawing/2014/main" id="{4D6F0C88-D204-47C9-98C6-591AEA656745}"/>
+                <a16:creationId xmlns:a16="http://schemas.microsoft.com/office/drawing/2014/main" id="{3F91F805-714C-43B7-A095-A0E229081B60}"/>
               </a:ext>
             </a:extLst>
           </p:cNvPr>
@@ -13957,7 +13957,7 @@
           <p:cNvPr id="6" name="">
             <a:extLst xmlns:a="http://schemas.openxmlformats.org/drawingml/2006/main">
               <a:ext uri="{FF2B5EF4-FFF2-40B4-BE49-F238E27FC236}">
-                <a16:creationId xmlns:a16="http://schemas.microsoft.com/office/drawing/2014/main" id="{82246484-8461-4021-B2AA-6F728BEB70E3}"/>
+                <a16:creationId xmlns:a16="http://schemas.microsoft.com/office/drawing/2014/main" id="{F9CD26F4-905C-4968-A1A6-1D95B113B3C3}"/>
               </a:ext>
             </a:extLst>
           </p:cNvPr>
@@ -13995,14 +13995,14 @@
             <a:pPr algn="r">
               <a:defRPr sz="675" b="1">
                 <a:solidFill>
-                  <a:srgbClr val="0E1B3E"/>
+                  <a:srgbClr val="070F26"/>
                 </a:solidFill>
               </a:defRPr>
             </a:pPr>
             <a:r>
               <a:rPr sz="675" b="1">
                 <a:solidFill>
-                  <a:srgbClr val="0E1B3E"/>
+                  <a:srgbClr val="070F26"/>
                 </a:solidFill>
               </a:rPr>
               <a:t>NTT DATA UNIVERSITY</a:t>
@@ -14015,7 +14015,7 @@
           <p:cNvPr id="7" name="">
             <a:extLst xmlns:a="http://schemas.openxmlformats.org/drawingml/2006/main">
               <a:ext uri="{FF2B5EF4-FFF2-40B4-BE49-F238E27FC236}">
-                <a16:creationId xmlns:a16="http://schemas.microsoft.com/office/drawing/2014/main" id="{0DE3479A-B1D1-4E05-92E2-468B81BF7578}"/>
+                <a16:creationId xmlns:a16="http://schemas.microsoft.com/office/drawing/2014/main" id="{2C3B967C-F42A-4843-986E-017353F6E00C}"/>
               </a:ext>
             </a:extLst>
           </p:cNvPr>
@@ -14073,7 +14073,7 @@
           <p:cNvPr id="8" name="">
             <a:extLst xmlns:a="http://schemas.openxmlformats.org/drawingml/2006/main">
               <a:ext uri="{FF2B5EF4-FFF2-40B4-BE49-F238E27FC236}">
-                <a16:creationId xmlns:a16="http://schemas.microsoft.com/office/drawing/2014/main" id="{2240D3B9-2567-46E2-8960-9EBC84EBFF58}"/>
+                <a16:creationId xmlns:a16="http://schemas.microsoft.com/office/drawing/2014/main" id="{96D7FD0D-5D4D-400B-92FF-D68E2D719727}"/>
               </a:ext>
             </a:extLst>
           </p:cNvPr>
@@ -14111,14 +14111,14 @@
             <a:pPr algn="l">
               <a:defRPr sz="2400" b="0">
                 <a:solidFill>
-                  <a:srgbClr val="0E1B3E"/>
+                  <a:srgbClr val="070F26"/>
                 </a:solidFill>
               </a:defRPr>
             </a:pPr>
             <a:r>
               <a:rPr sz="2400" b="0">
                 <a:solidFill>
-                  <a:srgbClr val="0E1B3E"/>
+                  <a:srgbClr val="070F26"/>
                 </a:solidFill>
               </a:rPr>
               <a:t>Sequência de comandos ao vivo</a:t>
@@ -14131,7 +14131,7 @@
           <p:cNvPr id="9" name="">
             <a:extLst xmlns:a="http://schemas.openxmlformats.org/drawingml/2006/main">
               <a:ext uri="{FF2B5EF4-FFF2-40B4-BE49-F238E27FC236}">
-                <a16:creationId xmlns:a16="http://schemas.microsoft.com/office/drawing/2014/main" id="{523B2EF7-0E4E-405E-BAE5-76EA36CEC8F3}"/>
+                <a16:creationId xmlns:a16="http://schemas.microsoft.com/office/drawing/2014/main" id="{9F44D3F2-F474-4DE9-B043-FC744CF32E60}"/>
               </a:ext>
             </a:extLst>
           </p:cNvPr>
@@ -14189,7 +14189,7 @@
           <p:cNvPr id="10" name="">
             <a:extLst xmlns:a="http://schemas.openxmlformats.org/drawingml/2006/main">
               <a:ext uri="{FF2B5EF4-FFF2-40B4-BE49-F238E27FC236}">
-                <a16:creationId xmlns:a16="http://schemas.microsoft.com/office/drawing/2014/main" id="{4C09301E-8817-4BC0-AD14-515CA57F12E8}"/>
+                <a16:creationId xmlns:a16="http://schemas.microsoft.com/office/drawing/2014/main" id="{044A477A-B393-4D6E-B38F-A6E3AA3F92B9}"/>
               </a:ext>
             </a:extLst>
           </p:cNvPr>
@@ -14222,7 +14222,7 @@
           <p:cNvPr id="11" name="">
             <a:extLst xmlns:a="http://schemas.openxmlformats.org/drawingml/2006/main">
               <a:ext uri="{FF2B5EF4-FFF2-40B4-BE49-F238E27FC236}">
-                <a16:creationId xmlns:a16="http://schemas.microsoft.com/office/drawing/2014/main" id="{90130FB3-42E7-445B-A562-6A5415CCB714}"/>
+                <a16:creationId xmlns:a16="http://schemas.microsoft.com/office/drawing/2014/main" id="{754AFCDD-35BA-437D-AF6B-16DCC7C3531B}"/>
               </a:ext>
             </a:extLst>
           </p:cNvPr>
@@ -14257,7 +14257,7 @@
           <p:cNvPr id="12" name="">
             <a:extLst xmlns:a="http://schemas.openxmlformats.org/drawingml/2006/main">
               <a:ext uri="{FF2B5EF4-FFF2-40B4-BE49-F238E27FC236}">
-                <a16:creationId xmlns:a16="http://schemas.microsoft.com/office/drawing/2014/main" id="{FC4F8946-A9E4-49CE-91BD-B46012494D75}"/>
+                <a16:creationId xmlns:a16="http://schemas.microsoft.com/office/drawing/2014/main" id="{BD6AEF0F-ACFF-40BD-8900-7BB8F9C252E8}"/>
               </a:ext>
             </a:extLst>
           </p:cNvPr>
@@ -14315,7 +14315,7 @@
           <p:cNvPr id="13" name="">
             <a:extLst xmlns:a="http://schemas.openxmlformats.org/drawingml/2006/main">
               <a:ext uri="{FF2B5EF4-FFF2-40B4-BE49-F238E27FC236}">
-                <a16:creationId xmlns:a16="http://schemas.microsoft.com/office/drawing/2014/main" id="{92246D1B-4D0A-4FA1-9A85-24A4564B7257}"/>
+                <a16:creationId xmlns:a16="http://schemas.microsoft.com/office/drawing/2014/main" id="{DBFC98BE-D498-474F-9A82-4DDC32E683B3}"/>
               </a:ext>
             </a:extLst>
           </p:cNvPr>
@@ -14485,7 +14485,7 @@
           <p:cNvPr id="14" name="">
             <a:extLst xmlns:a="http://schemas.openxmlformats.org/drawingml/2006/main">
               <a:ext uri="{FF2B5EF4-FFF2-40B4-BE49-F238E27FC236}">
-                <a16:creationId xmlns:a16="http://schemas.microsoft.com/office/drawing/2014/main" id="{C429920F-E386-4184-95BF-D82CFC29F4BE}"/>
+                <a16:creationId xmlns:a16="http://schemas.microsoft.com/office/drawing/2014/main" id="{A51B64A4-74C6-4B9B-B286-5F8042270E92}"/>
               </a:ext>
             </a:extLst>
           </p:cNvPr>
@@ -14518,7 +14518,7 @@
           <p:cNvPr id="15" name="">
             <a:extLst xmlns:a="http://schemas.openxmlformats.org/drawingml/2006/main">
               <a:ext uri="{FF2B5EF4-FFF2-40B4-BE49-F238E27FC236}">
-                <a16:creationId xmlns:a16="http://schemas.microsoft.com/office/drawing/2014/main" id="{026F2EF3-E242-494C-8BE4-25786D1774C5}"/>
+                <a16:creationId xmlns:a16="http://schemas.microsoft.com/office/drawing/2014/main" id="{404F34DF-E5B7-4F0C-ADBD-901671B6F628}"/>
               </a:ext>
             </a:extLst>
           </p:cNvPr>
@@ -14553,7 +14553,7 @@
           <p:cNvPr id="16" name="">
             <a:extLst xmlns:a="http://schemas.openxmlformats.org/drawingml/2006/main">
               <a:ext uri="{FF2B5EF4-FFF2-40B4-BE49-F238E27FC236}">
-                <a16:creationId xmlns:a16="http://schemas.microsoft.com/office/drawing/2014/main" id="{78F07D2A-A4B5-40EC-9C58-8009A2AB0253}"/>
+                <a16:creationId xmlns:a16="http://schemas.microsoft.com/office/drawing/2014/main" id="{C3BD4945-410F-4E8D-81BE-82DE49FBF275}"/>
               </a:ext>
             </a:extLst>
           </p:cNvPr>
@@ -14611,7 +14611,7 @@
           <p:cNvPr id="17" name="">
             <a:extLst xmlns:a="http://schemas.openxmlformats.org/drawingml/2006/main">
               <a:ext uri="{FF2B5EF4-FFF2-40B4-BE49-F238E27FC236}">
-                <a16:creationId xmlns:a16="http://schemas.microsoft.com/office/drawing/2014/main" id="{27916D49-6E6E-4070-8B54-59EC31711840}"/>
+                <a16:creationId xmlns:a16="http://schemas.microsoft.com/office/drawing/2014/main" id="{70D2C492-31CB-44FD-A8DC-5E1E6BBF1B9D}"/>
               </a:ext>
             </a:extLst>
           </p:cNvPr>
@@ -14801,7 +14801,7 @@
     </p:spTree>
     <p:extLst>
       <p:ext uri="{BB962C8B-B14F-4D97-AF65-F5344CB8AC3E}">
-        <p14:creationId xmlns:p14="http://schemas.microsoft.com/office/powerpoint/2010/main" val="2038199805"/>
+        <p14:creationId xmlns:p14="http://schemas.microsoft.com/office/powerpoint/2010/main" val="867481072"/>
       </p:ext>
     </p:extLst>
   </p:cSld>
